--- a/Doc/Utility AI의 구현과 검증.pptx
+++ b/Doc/Utility AI의 구현과 검증.pptx
@@ -8,24 +8,28 @@
     <p:sldId id="256" r:id="rId2"/>
     <p:sldId id="257" r:id="rId3"/>
     <p:sldId id="258" r:id="rId4"/>
-    <p:sldId id="259" r:id="rId5"/>
+    <p:sldId id="277" r:id="rId5"/>
     <p:sldId id="264" r:id="rId6"/>
     <p:sldId id="265" r:id="rId7"/>
     <p:sldId id="260" r:id="rId8"/>
     <p:sldId id="261" r:id="rId9"/>
     <p:sldId id="262" r:id="rId10"/>
     <p:sldId id="263" r:id="rId11"/>
-    <p:sldId id="266" r:id="rId12"/>
-    <p:sldId id="267" r:id="rId13"/>
-    <p:sldId id="268" r:id="rId14"/>
-    <p:sldId id="269" r:id="rId15"/>
-    <p:sldId id="270" r:id="rId16"/>
-    <p:sldId id="271" r:id="rId17"/>
-    <p:sldId id="273" r:id="rId18"/>
-    <p:sldId id="274" r:id="rId19"/>
-    <p:sldId id="272" r:id="rId20"/>
-    <p:sldId id="275" r:id="rId21"/>
-    <p:sldId id="276" r:id="rId22"/>
+    <p:sldId id="278" r:id="rId12"/>
+    <p:sldId id="259" r:id="rId13"/>
+    <p:sldId id="266" r:id="rId14"/>
+    <p:sldId id="267" r:id="rId15"/>
+    <p:sldId id="279" r:id="rId16"/>
+    <p:sldId id="268" r:id="rId17"/>
+    <p:sldId id="269" r:id="rId18"/>
+    <p:sldId id="270" r:id="rId19"/>
+    <p:sldId id="271" r:id="rId20"/>
+    <p:sldId id="273" r:id="rId21"/>
+    <p:sldId id="274" r:id="rId22"/>
+    <p:sldId id="272" r:id="rId23"/>
+    <p:sldId id="275" r:id="rId24"/>
+    <p:sldId id="276" r:id="rId25"/>
+    <p:sldId id="280" r:id="rId26"/>
   </p:sldIdLst>
   <p:sldSz cx="12192000" cy="6858000"/>
   <p:notesSz cx="6858000" cy="9144000"/>
@@ -124,6 +128,11 @@
       </a:defRPr>
     </a:lvl9pPr>
   </p:defaultTextStyle>
+  <p:extLst>
+    <p:ext uri="{EFAFB233-063F-42B5-8137-9DF3F51BA10A}">
+      <p15:sldGuideLst xmlns:p15="http://schemas.microsoft.com/office/powerpoint/2012/main"/>
+    </p:ext>
+  </p:extLst>
 </p:presentation>
 </file>
 
@@ -274,7 +283,7 @@
           <a:p>
             <a:fld id="{3EA76E61-7B8C-4F42-A9E9-943560D43BFA}" type="datetimeFigureOut">
               <a:rPr lang="ko-KR" altLang="en-US" smtClean="0"/>
-              <a:t>2026-03-03</a:t>
+              <a:t>2026-03-04</a:t>
             </a:fld>
             <a:endParaRPr lang="ko-KR" altLang="en-US"/>
           </a:p>
@@ -472,7 +481,7 @@
           <a:p>
             <a:fld id="{3EA76E61-7B8C-4F42-A9E9-943560D43BFA}" type="datetimeFigureOut">
               <a:rPr lang="ko-KR" altLang="en-US" smtClean="0"/>
-              <a:t>2026-03-03</a:t>
+              <a:t>2026-03-04</a:t>
             </a:fld>
             <a:endParaRPr lang="ko-KR" altLang="en-US"/>
           </a:p>
@@ -680,7 +689,7 @@
           <a:p>
             <a:fld id="{3EA76E61-7B8C-4F42-A9E9-943560D43BFA}" type="datetimeFigureOut">
               <a:rPr lang="ko-KR" altLang="en-US" smtClean="0"/>
-              <a:t>2026-03-03</a:t>
+              <a:t>2026-03-04</a:t>
             </a:fld>
             <a:endParaRPr lang="ko-KR" altLang="en-US"/>
           </a:p>
@@ -878,7 +887,7 @@
           <a:p>
             <a:fld id="{3EA76E61-7B8C-4F42-A9E9-943560D43BFA}" type="datetimeFigureOut">
               <a:rPr lang="ko-KR" altLang="en-US" smtClean="0"/>
-              <a:t>2026-03-03</a:t>
+              <a:t>2026-03-04</a:t>
             </a:fld>
             <a:endParaRPr lang="ko-KR" altLang="en-US"/>
           </a:p>
@@ -1153,7 +1162,7 @@
           <a:p>
             <a:fld id="{3EA76E61-7B8C-4F42-A9E9-943560D43BFA}" type="datetimeFigureOut">
               <a:rPr lang="ko-KR" altLang="en-US" smtClean="0"/>
-              <a:t>2026-03-03</a:t>
+              <a:t>2026-03-04</a:t>
             </a:fld>
             <a:endParaRPr lang="ko-KR" altLang="en-US"/>
           </a:p>
@@ -1418,7 +1427,7 @@
           <a:p>
             <a:fld id="{3EA76E61-7B8C-4F42-A9E9-943560D43BFA}" type="datetimeFigureOut">
               <a:rPr lang="ko-KR" altLang="en-US" smtClean="0"/>
-              <a:t>2026-03-03</a:t>
+              <a:t>2026-03-04</a:t>
             </a:fld>
             <a:endParaRPr lang="ko-KR" altLang="en-US"/>
           </a:p>
@@ -1830,7 +1839,7 @@
           <a:p>
             <a:fld id="{3EA76E61-7B8C-4F42-A9E9-943560D43BFA}" type="datetimeFigureOut">
               <a:rPr lang="ko-KR" altLang="en-US" smtClean="0"/>
-              <a:t>2026-03-03</a:t>
+              <a:t>2026-03-04</a:t>
             </a:fld>
             <a:endParaRPr lang="ko-KR" altLang="en-US"/>
           </a:p>
@@ -1971,7 +1980,7 @@
           <a:p>
             <a:fld id="{3EA76E61-7B8C-4F42-A9E9-943560D43BFA}" type="datetimeFigureOut">
               <a:rPr lang="ko-KR" altLang="en-US" smtClean="0"/>
-              <a:t>2026-03-03</a:t>
+              <a:t>2026-03-04</a:t>
             </a:fld>
             <a:endParaRPr lang="ko-KR" altLang="en-US"/>
           </a:p>
@@ -2084,7 +2093,7 @@
           <a:p>
             <a:fld id="{3EA76E61-7B8C-4F42-A9E9-943560D43BFA}" type="datetimeFigureOut">
               <a:rPr lang="ko-KR" altLang="en-US" smtClean="0"/>
-              <a:t>2026-03-03</a:t>
+              <a:t>2026-03-04</a:t>
             </a:fld>
             <a:endParaRPr lang="ko-KR" altLang="en-US"/>
           </a:p>
@@ -2395,7 +2404,7 @@
           <a:p>
             <a:fld id="{3EA76E61-7B8C-4F42-A9E9-943560D43BFA}" type="datetimeFigureOut">
               <a:rPr lang="ko-KR" altLang="en-US" smtClean="0"/>
-              <a:t>2026-03-03</a:t>
+              <a:t>2026-03-04</a:t>
             </a:fld>
             <a:endParaRPr lang="ko-KR" altLang="en-US"/>
           </a:p>
@@ -2683,7 +2692,7 @@
           <a:p>
             <a:fld id="{3EA76E61-7B8C-4F42-A9E9-943560D43BFA}" type="datetimeFigureOut">
               <a:rPr lang="ko-KR" altLang="en-US" smtClean="0"/>
-              <a:t>2026-03-03</a:t>
+              <a:t>2026-03-04</a:t>
             </a:fld>
             <a:endParaRPr lang="ko-KR" altLang="en-US"/>
           </a:p>
@@ -2924,7 +2933,7 @@
           <a:p>
             <a:fld id="{3EA76E61-7B8C-4F42-A9E9-943560D43BFA}" type="datetimeFigureOut">
               <a:rPr lang="ko-KR" altLang="en-US" smtClean="0"/>
-              <a:t>2026-03-03</a:t>
+              <a:t>2026-03-04</a:t>
             </a:fld>
             <a:endParaRPr lang="ko-KR" altLang="en-US"/>
           </a:p>
@@ -3466,61 +3475,205 @@
           </a:p>
         </p:txBody>
       </p:sp>
-      <p:sp>
-        <p:nvSpPr>
-          <p:cNvPr id="3" name="내용 개체 틀 2">
-            <a:extLst>
-              <a:ext uri="{FF2B5EF4-FFF2-40B4-BE49-F238E27FC236}">
-                <a16:creationId xmlns:a16="http://schemas.microsoft.com/office/drawing/2014/main" id="{05CCA8B5-B930-2FF9-F62B-A3055E718682}"/>
-              </a:ext>
-            </a:extLst>
-          </p:cNvPr>
-          <p:cNvSpPr>
-            <a:spLocks noGrp="1"/>
-          </p:cNvSpPr>
-          <p:nvPr>
-            <p:ph idx="1"/>
-          </p:nvPr>
-        </p:nvSpPr>
-        <p:spPr/>
-        <p:txBody>
-          <a:bodyPr/>
-          <a:lstStyle/>
-          <a:p>
-            <a:r>
-              <a:rPr lang="en-US" altLang="ko-KR" dirty="0"/>
-              <a:t>G </a:t>
-            </a:r>
-            <a:r>
-              <a:rPr lang="ko-KR" altLang="en-US" dirty="0"/>
-              <a:t>타입은 개인의 성장</a:t>
-            </a:r>
-            <a:r>
-              <a:rPr lang="en-US" altLang="ko-KR" dirty="0"/>
-              <a:t>, </a:t>
-            </a:r>
-            <a:r>
-              <a:rPr lang="ko-KR" altLang="en-US" dirty="0"/>
-              <a:t>자아실현에 관련됨</a:t>
-            </a:r>
-            <a:endParaRPr lang="en-US" altLang="ko-KR" dirty="0"/>
-          </a:p>
-          <a:p>
-            <a:r>
-              <a:rPr lang="ko-KR" altLang="en-US" dirty="0"/>
-              <a:t> 이 시스템에서는 스킬의 연습 혹은 과목의 공부에 관여함</a:t>
-            </a:r>
-            <a:endParaRPr lang="en-US" altLang="ko-KR" dirty="0"/>
-          </a:p>
-          <a:p>
-            <a:r>
-              <a:rPr lang="ko-KR" altLang="en-US" dirty="0"/>
-              <a:t>숙제가 있어도 친구와 놀거나 만화를 보는 학생들처럼 항상 작용 하지 않고 오히려 다른 욕구가 충족되어야 비로소 영향을 발휘함</a:t>
-            </a:r>
-            <a:endParaRPr lang="en-US" altLang="ko-KR" dirty="0"/>
-          </a:p>
-        </p:txBody>
-      </p:sp>
+      <mc:AlternateContent xmlns:mc="http://schemas.openxmlformats.org/markup-compatibility/2006" xmlns:a14="http://schemas.microsoft.com/office/drawing/2010/main">
+        <mc:Choice Requires="a14">
+          <p:sp>
+            <p:nvSpPr>
+              <p:cNvPr id="3" name="내용 개체 틀 2">
+                <a:extLst>
+                  <a:ext uri="{FF2B5EF4-FFF2-40B4-BE49-F238E27FC236}">
+                    <a16:creationId xmlns:a16="http://schemas.microsoft.com/office/drawing/2014/main" id="{05CCA8B5-B930-2FF9-F62B-A3055E718682}"/>
+                  </a:ext>
+                </a:extLst>
+              </p:cNvPr>
+              <p:cNvSpPr>
+                <a:spLocks noGrp="1"/>
+              </p:cNvSpPr>
+              <p:nvPr>
+                <p:ph idx="1"/>
+              </p:nvPr>
+            </p:nvSpPr>
+            <p:spPr/>
+            <p:txBody>
+              <a:bodyPr/>
+              <a:lstStyle/>
+              <a:p>
+                <a:r>
+                  <a:rPr lang="en-US" altLang="ko-KR" dirty="0"/>
+                  <a:t>G </a:t>
+                </a:r>
+                <a:r>
+                  <a:rPr lang="ko-KR" altLang="en-US" dirty="0"/>
+                  <a:t>타입은 개인의 성장</a:t>
+                </a:r>
+                <a:r>
+                  <a:rPr lang="en-US" altLang="ko-KR" dirty="0"/>
+                  <a:t>, </a:t>
+                </a:r>
+                <a:r>
+                  <a:rPr lang="ko-KR" altLang="en-US" dirty="0"/>
+                  <a:t>자아실현에 관련됨</a:t>
+                </a:r>
+                <a:endParaRPr lang="en-US" altLang="ko-KR" dirty="0"/>
+              </a:p>
+              <a:p>
+                <a:r>
+                  <a:rPr lang="ko-KR" altLang="en-US" dirty="0"/>
+                  <a:t> 이 시스템에서는 스킬의 연습 혹은 과목의 공부에 관여함</a:t>
+                </a:r>
+                <a:endParaRPr lang="en-US" altLang="ko-KR" dirty="0"/>
+              </a:p>
+              <a:p>
+                <a:r>
+                  <a:rPr lang="ko-KR" altLang="en-US" dirty="0"/>
+                  <a:t>숙제가 있어도 친구와 놀거나 만화를 보는 학생들처럼 항상 작용 하지 않고 오히려 다른 욕구가 충족되어야 비로소 영향을 발휘함</a:t>
+                </a:r>
+                <a:endParaRPr lang="en-US" altLang="ko-KR" dirty="0"/>
+              </a:p>
+              <a:p>
+                <a:r>
+                  <a:rPr lang="ko-KR" altLang="en-US" dirty="0"/>
+                  <a:t>이 시스템에서는 다음의 수식으로 표현함</a:t>
+                </a:r>
+                <a:br>
+                  <a:rPr lang="en-US" altLang="ko-KR" dirty="0"/>
+                </a:br>
+                <a:r>
+                  <a:rPr lang="en-US" altLang="ko-KR" dirty="0"/>
+                  <a:t>		</a:t>
+                </a:r>
+                <a14:m>
+                  <m:oMath xmlns:m="http://schemas.openxmlformats.org/officeDocument/2006/math">
+                    <m:r>
+                      <m:rPr>
+                        <m:sty m:val="p"/>
+                      </m:rPr>
+                      <a:rPr lang="en-US" altLang="ko-KR" b="0" i="1" smtClean="0">
+                        <a:latin typeface="Cambria Math" panose="02040503050406030204" pitchFamily="18" charset="0"/>
+                      </a:rPr>
+                      <m:t>diff</m:t>
+                    </m:r>
+                    <m:r>
+                      <a:rPr lang="en-US" altLang="ko-KR" b="0" i="1" smtClean="0">
+                        <a:latin typeface="Cambria Math" panose="02040503050406030204" pitchFamily="18" charset="0"/>
+                      </a:rPr>
+                      <m:t> = </m:t>
+                    </m:r>
+                    <m:d>
+                      <m:dPr>
+                        <m:ctrlPr>
+                          <a:rPr lang="en-US" altLang="ko-KR" b="0" i="1" smtClean="0">
+                            <a:latin typeface="Cambria Math" panose="02040503050406030204" pitchFamily="18" charset="0"/>
+                          </a:rPr>
+                        </m:ctrlPr>
+                      </m:dPr>
+                      <m:e>
+                        <m:r>
+                          <a:rPr lang="en-US" altLang="ko-KR" b="0" i="1" smtClean="0">
+                            <a:latin typeface="Cambria Math" panose="02040503050406030204" pitchFamily="18" charset="0"/>
+                          </a:rPr>
+                          <m:t>100−</m:t>
+                        </m:r>
+                        <m:r>
+                          <m:rPr>
+                            <m:sty m:val="p"/>
+                          </m:rPr>
+                          <a:rPr lang="en-US" altLang="ko-KR" b="0" i="1" smtClean="0">
+                            <a:latin typeface="Cambria Math" panose="02040503050406030204" pitchFamily="18" charset="0"/>
+                          </a:rPr>
+                          <m:t>val</m:t>
+                        </m:r>
+                      </m:e>
+                    </m:d>
+                    <m:r>
+                      <a:rPr lang="en-US" altLang="ko-KR" b="0" i="1" smtClean="0">
+                        <a:latin typeface="Cambria Math" panose="02040503050406030204" pitchFamily="18" charset="0"/>
+                      </a:rPr>
+                      <m:t>,  </m:t>
+                    </m:r>
+                    <m:r>
+                      <m:rPr>
+                        <m:sty m:val="p"/>
+                      </m:rPr>
+                      <a:rPr lang="en-US" altLang="ko-KR" b="0" i="1" smtClean="0">
+                        <a:latin typeface="Cambria Math" panose="02040503050406030204" pitchFamily="18" charset="0"/>
+                      </a:rPr>
+                      <m:t>score</m:t>
+                    </m:r>
+                    <m:r>
+                      <a:rPr lang="en-US" altLang="ko-KR" b="0" i="1" smtClean="0">
+                        <a:latin typeface="Cambria Math" panose="02040503050406030204" pitchFamily="18" charset="0"/>
+                      </a:rPr>
+                      <m:t> = 2000∙</m:t>
+                    </m:r>
+                    <m:r>
+                      <m:rPr>
+                        <m:sty m:val="p"/>
+                      </m:rPr>
+                      <a:rPr lang="en-US" altLang="ko-KR" b="0" i="1" smtClean="0">
+                        <a:latin typeface="Cambria Math" panose="02040503050406030204" pitchFamily="18" charset="0"/>
+                        <a:ea typeface="Cambria Math" panose="02040503050406030204" pitchFamily="18" charset="0"/>
+                      </a:rPr>
+                      <m:t>diff</m:t>
+                    </m:r>
+                    <m:r>
+                      <a:rPr lang="en-US" altLang="ko-KR" b="0" i="1" smtClean="0">
+                        <a:latin typeface="Cambria Math" panose="02040503050406030204" pitchFamily="18" charset="0"/>
+                        <a:ea typeface="Cambria Math" panose="02040503050406030204" pitchFamily="18" charset="0"/>
+                      </a:rPr>
+                      <m:t>+1000</m:t>
+                    </m:r>
+                  </m:oMath>
+                </a14:m>
+                <a:r>
+                  <a:rPr lang="ko-KR" altLang="en-US" dirty="0"/>
+                  <a:t> </a:t>
+                </a:r>
+                <a:endParaRPr lang="en-US" altLang="ko-KR" dirty="0"/>
+              </a:p>
+            </p:txBody>
+          </p:sp>
+        </mc:Choice>
+        <mc:Fallback xmlns="">
+          <p:sp>
+            <p:nvSpPr>
+              <p:cNvPr id="3" name="내용 개체 틀 2">
+                <a:extLst>
+                  <a:ext uri="{FF2B5EF4-FFF2-40B4-BE49-F238E27FC236}">
+                    <a16:creationId xmlns:a16="http://schemas.microsoft.com/office/drawing/2014/main" id="{05CCA8B5-B930-2FF9-F62B-A3055E718682}"/>
+                  </a:ext>
+                </a:extLst>
+              </p:cNvPr>
+              <p:cNvSpPr>
+                <a:spLocks noGrp="1" noRot="1" noChangeAspect="1" noMove="1" noResize="1" noEditPoints="1" noAdjustHandles="1" noChangeArrowheads="1" noChangeShapeType="1" noTextEdit="1"/>
+              </p:cNvSpPr>
+              <p:nvPr>
+                <p:ph idx="1"/>
+              </p:nvPr>
+            </p:nvSpPr>
+            <p:spPr>
+              <a:blipFill>
+                <a:blip r:embed="rId2"/>
+                <a:stretch>
+                  <a:fillRect l="-1043" t="-2381" r="-348"/>
+                </a:stretch>
+              </a:blipFill>
+            </p:spPr>
+            <p:txBody>
+              <a:bodyPr/>
+              <a:lstStyle/>
+              <a:p>
+                <a:r>
+                  <a:rPr lang="ko-KR" altLang="en-US">
+                    <a:noFill/>
+                  </a:rPr>
+                  <a:t> </a:t>
+                </a:r>
+              </a:p>
+            </p:txBody>
+          </p:sp>
+        </mc:Fallback>
+      </mc:AlternateContent>
     </p:spTree>
     <p:extLst>
       <p:ext uri="{BB962C8B-B14F-4D97-AF65-F5344CB8AC3E}">
@@ -3556,6 +3709,234 @@
           <p:cNvPr id="2" name="제목 1">
             <a:extLst>
               <a:ext uri="{FF2B5EF4-FFF2-40B4-BE49-F238E27FC236}">
+                <a16:creationId xmlns:a16="http://schemas.microsoft.com/office/drawing/2014/main" id="{D0E1FFBE-9175-BDDC-F934-455C4F31817A}"/>
+              </a:ext>
+            </a:extLst>
+          </p:cNvPr>
+          <p:cNvSpPr>
+            <a:spLocks noGrp="1"/>
+          </p:cNvSpPr>
+          <p:nvPr>
+            <p:ph type="title"/>
+          </p:nvPr>
+        </p:nvSpPr>
+        <p:spPr/>
+        <p:txBody>
+          <a:bodyPr/>
+          <a:lstStyle/>
+          <a:p>
+            <a:r>
+              <a:rPr lang="ko-KR" altLang="en-US" dirty="0"/>
+              <a:t>각 타입의 특성</a:t>
+            </a:r>
+          </a:p>
+        </p:txBody>
+      </p:sp>
+      <p:pic>
+        <p:nvPicPr>
+          <p:cNvPr id="9" name="내용 개체 틀 8">
+            <a:extLst>
+              <a:ext uri="{FF2B5EF4-FFF2-40B4-BE49-F238E27FC236}">
+                <a16:creationId xmlns:a16="http://schemas.microsoft.com/office/drawing/2014/main" id="{C9B8A585-943C-E0C6-1DB0-A87C8C6C8A78}"/>
+              </a:ext>
+            </a:extLst>
+          </p:cNvPr>
+          <p:cNvPicPr>
+            <a:picLocks noGrp="1" noChangeAspect="1"/>
+          </p:cNvPicPr>
+          <p:nvPr>
+            <p:ph idx="1"/>
+          </p:nvPr>
+        </p:nvPicPr>
+        <p:blipFill>
+          <a:blip r:embed="rId2">
+            <a:extLst>
+              <a:ext uri="{28A0092B-C50C-407E-A947-70E740481C1C}">
+                <a14:useLocalDpi xmlns:a14="http://schemas.microsoft.com/office/drawing/2010/main" val="0"/>
+              </a:ext>
+            </a:extLst>
+          </a:blip>
+          <a:stretch>
+            <a:fillRect/>
+          </a:stretch>
+        </p:blipFill>
+        <p:spPr>
+          <a:xfrm>
+            <a:off x="1548341" y="1825625"/>
+            <a:ext cx="9095318" cy="4351338"/>
+          </a:xfrm>
+          <a:prstGeom prst="rect">
+            <a:avLst/>
+          </a:prstGeom>
+        </p:spPr>
+      </p:pic>
+    </p:spTree>
+    <p:extLst>
+      <p:ext uri="{BB962C8B-B14F-4D97-AF65-F5344CB8AC3E}">
+        <p14:creationId xmlns:p14="http://schemas.microsoft.com/office/powerpoint/2010/main" val="3843472230"/>
+      </p:ext>
+    </p:extLst>
+  </p:cSld>
+  <p:clrMapOvr>
+    <a:masterClrMapping/>
+  </p:clrMapOvr>
+</p:sld>
+</file>
+
+<file path=ppt/slides/slide12.xml><?xml version="1.0" encoding="utf-8"?>
+<p:sld xmlns:a="http://schemas.openxmlformats.org/drawingml/2006/main" xmlns:r="http://schemas.openxmlformats.org/officeDocument/2006/relationships" xmlns:p="http://schemas.openxmlformats.org/presentationml/2006/main">
+  <p:cSld>
+    <p:spTree>
+      <p:nvGrpSpPr>
+        <p:cNvPr id="1" name=""/>
+        <p:cNvGrpSpPr/>
+        <p:nvPr/>
+      </p:nvGrpSpPr>
+      <p:grpSpPr>
+        <a:xfrm>
+          <a:off x="0" y="0"/>
+          <a:ext cx="0" cy="0"/>
+          <a:chOff x="0" y="0"/>
+          <a:chExt cx="0" cy="0"/>
+        </a:xfrm>
+      </p:grpSpPr>
+      <p:sp>
+        <p:nvSpPr>
+          <p:cNvPr id="2" name="제목 1">
+            <a:extLst>
+              <a:ext uri="{FF2B5EF4-FFF2-40B4-BE49-F238E27FC236}">
+                <a16:creationId xmlns:a16="http://schemas.microsoft.com/office/drawing/2014/main" id="{36B9A922-8837-47E3-F4E0-66233088315A}"/>
+              </a:ext>
+            </a:extLst>
+          </p:cNvPr>
+          <p:cNvSpPr>
+            <a:spLocks noGrp="1"/>
+          </p:cNvSpPr>
+          <p:nvPr>
+            <p:ph type="title"/>
+          </p:nvPr>
+        </p:nvSpPr>
+        <p:spPr/>
+        <p:txBody>
+          <a:bodyPr/>
+          <a:lstStyle/>
+          <a:p>
+            <a:r>
+              <a:rPr lang="ko-KR" altLang="en-US" dirty="0"/>
+              <a:t>행동 평가 설계</a:t>
+            </a:r>
+          </a:p>
+        </p:txBody>
+      </p:sp>
+      <p:sp>
+        <p:nvSpPr>
+          <p:cNvPr id="3" name="내용 개체 틀 2">
+            <a:extLst>
+              <a:ext uri="{FF2B5EF4-FFF2-40B4-BE49-F238E27FC236}">
+                <a16:creationId xmlns:a16="http://schemas.microsoft.com/office/drawing/2014/main" id="{E2222103-659B-3CE1-F791-C356DE1E9BF8}"/>
+              </a:ext>
+            </a:extLst>
+          </p:cNvPr>
+          <p:cNvSpPr>
+            <a:spLocks noGrp="1"/>
+          </p:cNvSpPr>
+          <p:nvPr>
+            <p:ph idx="1"/>
+          </p:nvPr>
+        </p:nvSpPr>
+        <p:spPr/>
+        <p:txBody>
+          <a:bodyPr/>
+          <a:lstStyle/>
+          <a:p>
+            <a:r>
+              <a:rPr lang="ko-KR" altLang="en-US" dirty="0"/>
+              <a:t>모든 액션에는 결과값이 존재</a:t>
+            </a:r>
+            <a:endParaRPr lang="en-US" altLang="ko-KR" dirty="0"/>
+          </a:p>
+          <a:p>
+            <a:r>
+              <a:rPr lang="ko-KR" altLang="en-US" dirty="0"/>
+              <a:t>스킬의 경험치</a:t>
+            </a:r>
+            <a:r>
+              <a:rPr lang="en-US" altLang="ko-KR" dirty="0"/>
+              <a:t>, </a:t>
+            </a:r>
+            <a:r>
+              <a:rPr lang="ko-KR" altLang="en-US" dirty="0"/>
+              <a:t>호감도</a:t>
+            </a:r>
+            <a:r>
+              <a:rPr lang="en-US" altLang="ko-KR" dirty="0"/>
+              <a:t> </a:t>
+            </a:r>
+            <a:r>
+              <a:rPr lang="ko-KR" altLang="en-US" dirty="0"/>
+              <a:t>혹은 배고픔과 같은 상태 변화</a:t>
+            </a:r>
+            <a:endParaRPr lang="en-US" altLang="ko-KR" dirty="0"/>
+          </a:p>
+          <a:p>
+            <a:r>
+              <a:rPr lang="ko-KR" altLang="en-US" dirty="0"/>
+              <a:t>모든 능력치를 하나의 함수로 평가하는 것은 어렵다</a:t>
+            </a:r>
+            <a:endParaRPr lang="en-US" altLang="ko-KR" dirty="0"/>
+          </a:p>
+          <a:p>
+            <a:r>
+              <a:rPr lang="ko-KR" altLang="en-US" dirty="0"/>
+              <a:t>따라서 모든 능력치의 변화를 </a:t>
+            </a:r>
+            <a:r>
+              <a:rPr lang="en-US" altLang="ko-KR" dirty="0"/>
+              <a:t>AI</a:t>
+            </a:r>
+            <a:r>
+              <a:rPr lang="ko-KR" altLang="en-US" dirty="0"/>
+              <a:t>가 필요로 하는 욕구로 환산하여 계산</a:t>
+            </a:r>
+            <a:endParaRPr lang="en-US" altLang="ko-KR" dirty="0"/>
+          </a:p>
+        </p:txBody>
+      </p:sp>
+    </p:spTree>
+    <p:extLst>
+      <p:ext uri="{BB962C8B-B14F-4D97-AF65-F5344CB8AC3E}">
+        <p14:creationId xmlns:p14="http://schemas.microsoft.com/office/powerpoint/2010/main" val="2343917839"/>
+      </p:ext>
+    </p:extLst>
+  </p:cSld>
+  <p:clrMapOvr>
+    <a:masterClrMapping/>
+  </p:clrMapOvr>
+</p:sld>
+</file>
+
+<file path=ppt/slides/slide13.xml><?xml version="1.0" encoding="utf-8"?>
+<p:sld xmlns:a="http://schemas.openxmlformats.org/drawingml/2006/main" xmlns:r="http://schemas.openxmlformats.org/officeDocument/2006/relationships" xmlns:p="http://schemas.openxmlformats.org/presentationml/2006/main">
+  <p:cSld>
+    <p:spTree>
+      <p:nvGrpSpPr>
+        <p:cNvPr id="1" name=""/>
+        <p:cNvGrpSpPr/>
+        <p:nvPr/>
+      </p:nvGrpSpPr>
+      <p:grpSpPr>
+        <a:xfrm>
+          <a:off x="0" y="0"/>
+          <a:ext cx="0" cy="0"/>
+          <a:chOff x="0" y="0"/>
+          <a:chExt cx="0" cy="0"/>
+        </a:xfrm>
+      </p:grpSpPr>
+      <p:sp>
+        <p:nvSpPr>
+          <p:cNvPr id="2" name="제목 1">
+            <a:extLst>
+              <a:ext uri="{FF2B5EF4-FFF2-40B4-BE49-F238E27FC236}">
                 <a16:creationId xmlns:a16="http://schemas.microsoft.com/office/drawing/2014/main" id="{B65D8B18-CDF6-6479-6CD3-E6062657E291}"/>
               </a:ext>
             </a:extLst>
@@ -3622,8 +4003,8 @@
           </a:p>
         </p:txBody>
       </p:sp>
-      <mc:AlternateContent xmlns:mc="http://schemas.openxmlformats.org/markup-compatibility/2006">
-        <mc:Choice xmlns:a14="http://schemas.microsoft.com/office/drawing/2010/main" Requires="a14">
+      <mc:AlternateContent xmlns:mc="http://schemas.openxmlformats.org/markup-compatibility/2006" xmlns:a14="http://schemas.microsoft.com/office/drawing/2010/main">
+        <mc:Choice Requires="a14">
           <p:sp>
             <p:nvSpPr>
               <p:cNvPr id="5" name="TextBox 4">
@@ -3639,7 +4020,7 @@
             <p:spPr>
               <a:xfrm>
                 <a:off x="1197339" y="3580018"/>
-                <a:ext cx="9797321" cy="557268"/>
+                <a:ext cx="9797321" cy="542584"/>
               </a:xfrm>
               <a:prstGeom prst="rect">
                 <a:avLst/>
@@ -3819,7 +4200,7 @@
                                 <a:latin typeface="Cambria Math" panose="02040503050406030204" pitchFamily="18" charset="0"/>
                                 <a:ea typeface="Cambria Math" panose="02040503050406030204" pitchFamily="18" charset="0"/>
                               </a:rPr>
-                              <m:t>types</m:t>
+                              <m:t>t</m:t>
                             </m:r>
                           </m:sub>
                           <m:sup/>
@@ -3899,7 +4280,7 @@
                                   <a:rPr lang="en-US" altLang="ko-KR" sz="3200" b="0" i="1" smtClean="0">
                                     <a:latin typeface="Cambria Math" panose="02040503050406030204" pitchFamily="18" charset="0"/>
                                   </a:rPr>
-                                  <m:t>-</m:t>
+                                  <m:t>−</m:t>
                                 </m:r>
                                 <m:sSub>
                                   <m:sSubPr>
@@ -3969,7 +4350,7 @@
             </p:txBody>
           </p:sp>
         </mc:Choice>
-        <mc:Fallback>
+        <mc:Fallback xmlns="">
           <p:sp>
             <p:nvSpPr>
               <p:cNvPr id="5" name="TextBox 4">
@@ -3987,7 +4368,7 @@
             <p:spPr>
               <a:xfrm>
                 <a:off x="1197339" y="3580018"/>
-                <a:ext cx="9797321" cy="557268"/>
+                <a:ext cx="9797321" cy="542584"/>
               </a:xfrm>
               <a:prstGeom prst="rect">
                 <a:avLst/>
@@ -3995,7 +4376,7 @@
               <a:blipFill>
                 <a:blip r:embed="rId2"/>
                 <a:stretch>
-                  <a:fillRect l="-2488" t="-23913" b="-29348"/>
+                  <a:fillRect l="-2488" t="-24719" b="-33708"/>
                 </a:stretch>
               </a:blipFill>
             </p:spPr>
@@ -4027,7 +4408,7 @@
 </p:sld>
 </file>
 
-<file path=ppt/slides/slide12.xml><?xml version="1.0" encoding="utf-8"?>
+<file path=ppt/slides/slide14.xml><?xml version="1.0" encoding="utf-8"?>
 <p:sld xmlns:a="http://schemas.openxmlformats.org/drawingml/2006/main" xmlns:r="http://schemas.openxmlformats.org/officeDocument/2006/relationships" xmlns:p="http://schemas.openxmlformats.org/presentationml/2006/main">
   <p:cSld>
     <p:spTree>
@@ -4067,7 +4448,7 @@
           <a:p>
             <a:r>
               <a:rPr lang="ko-KR" altLang="en-US" dirty="0"/>
-              <a:t>개인차를 고려</a:t>
+              <a:t>개인차의 고려</a:t>
             </a:r>
           </a:p>
         </p:txBody>
@@ -4363,7 +4744,7 @@
 </p:sld>
 </file>
 
-<file path=ppt/slides/slide13.xml><?xml version="1.0" encoding="utf-8"?>
+<file path=ppt/slides/slide15.xml><?xml version="1.0" encoding="utf-8"?>
 <p:sld xmlns:a="http://schemas.openxmlformats.org/drawingml/2006/main" xmlns:r="http://schemas.openxmlformats.org/officeDocument/2006/relationships" xmlns:p="http://schemas.openxmlformats.org/presentationml/2006/main">
   <p:cSld>
     <p:spTree>
@@ -4385,6 +4766,384 @@
           <p:cNvPr id="2" name="제목 1">
             <a:extLst>
               <a:ext uri="{FF2B5EF4-FFF2-40B4-BE49-F238E27FC236}">
+                <a16:creationId xmlns:a16="http://schemas.microsoft.com/office/drawing/2014/main" id="{2808385B-FA48-2871-5945-99821A822EBF}"/>
+              </a:ext>
+            </a:extLst>
+          </p:cNvPr>
+          <p:cNvSpPr>
+            <a:spLocks noGrp="1"/>
+          </p:cNvSpPr>
+          <p:nvPr>
+            <p:ph type="title"/>
+          </p:nvPr>
+        </p:nvSpPr>
+        <p:spPr/>
+        <p:txBody>
+          <a:bodyPr/>
+          <a:lstStyle/>
+          <a:p>
+            <a:r>
+              <a:rPr lang="ko-KR" altLang="en-US" dirty="0"/>
+              <a:t>개인차의 고려</a:t>
+            </a:r>
+          </a:p>
+        </p:txBody>
+      </p:sp>
+      <p:sp>
+        <p:nvSpPr>
+          <p:cNvPr id="3" name="내용 개체 틀 2">
+            <a:extLst>
+              <a:ext uri="{FF2B5EF4-FFF2-40B4-BE49-F238E27FC236}">
+                <a16:creationId xmlns:a16="http://schemas.microsoft.com/office/drawing/2014/main" id="{318CE4E2-9174-4369-08EA-EF28655E7763}"/>
+              </a:ext>
+            </a:extLst>
+          </p:cNvPr>
+          <p:cNvSpPr>
+            <a:spLocks noGrp="1"/>
+          </p:cNvSpPr>
+          <p:nvPr>
+            <p:ph idx="1"/>
+          </p:nvPr>
+        </p:nvSpPr>
+        <p:spPr/>
+        <p:txBody>
+          <a:bodyPr/>
+          <a:lstStyle/>
+          <a:p>
+            <a:r>
+              <a:rPr lang="ko-KR" altLang="en-US" dirty="0"/>
+              <a:t>그 밖에 </a:t>
+            </a:r>
+            <a:r>
+              <a:rPr lang="en-US" altLang="ko-KR" dirty="0"/>
+              <a:t>MBTI </a:t>
+            </a:r>
+            <a:r>
+              <a:rPr lang="ko-KR" altLang="en-US" dirty="0"/>
+              <a:t>성격 유형에 따른 보너스도 고려</a:t>
+            </a:r>
+          </a:p>
+        </p:txBody>
+      </p:sp>
+      <p:graphicFrame>
+        <p:nvGraphicFramePr>
+          <p:cNvPr id="4" name="표 3">
+            <a:extLst>
+              <a:ext uri="{FF2B5EF4-FFF2-40B4-BE49-F238E27FC236}">
+                <a16:creationId xmlns:a16="http://schemas.microsoft.com/office/drawing/2014/main" id="{2CC3C570-F25B-7530-3104-E4E7F5C757EF}"/>
+              </a:ext>
+            </a:extLst>
+          </p:cNvPr>
+          <p:cNvGraphicFramePr>
+            <a:graphicFrameLocks noGrp="1"/>
+          </p:cNvGraphicFramePr>
+          <p:nvPr>
+            <p:extLst>
+              <p:ext uri="{D42A27DB-BD31-4B8C-83A1-F6EECF244321}">
+                <p14:modId xmlns:p14="http://schemas.microsoft.com/office/powerpoint/2010/main" val="3210679025"/>
+              </p:ext>
+            </p:extLst>
+          </p:nvPr>
+        </p:nvGraphicFramePr>
+        <p:xfrm>
+          <a:off x="2032000" y="3074194"/>
+          <a:ext cx="8128000" cy="2397760"/>
+        </p:xfrm>
+        <a:graphic>
+          <a:graphicData uri="http://schemas.openxmlformats.org/drawingml/2006/table">
+            <a:tbl>
+              <a:tblPr firstRow="1" bandRow="1">
+                <a:tableStyleId>{5C22544A-7EE6-4342-B048-85BDC9FD1C3A}</a:tableStyleId>
+              </a:tblPr>
+              <a:tblGrid>
+                <a:gridCol w="4064000">
+                  <a:extLst>
+                    <a:ext uri="{9D8B030D-6E8A-4147-A177-3AD203B41FA5}">
+                      <a16:colId xmlns:a16="http://schemas.microsoft.com/office/drawing/2014/main" val="1473495201"/>
+                    </a:ext>
+                  </a:extLst>
+                </a:gridCol>
+                <a:gridCol w="4064000">
+                  <a:extLst>
+                    <a:ext uri="{9D8B030D-6E8A-4147-A177-3AD203B41FA5}">
+                      <a16:colId xmlns:a16="http://schemas.microsoft.com/office/drawing/2014/main" val="2885618763"/>
+                    </a:ext>
+                  </a:extLst>
+                </a:gridCol>
+              </a:tblGrid>
+              <a:tr h="370840">
+                <a:tc>
+                  <a:txBody>
+                    <a:bodyPr/>
+                    <a:lstStyle/>
+                    <a:p>
+                      <a:pPr latinLnBrk="1"/>
+                      <a:r>
+                        <a:rPr lang="ko-KR" altLang="en-US" dirty="0"/>
+                        <a:t>유형</a:t>
+                      </a:r>
+                    </a:p>
+                  </a:txBody>
+                  <a:tcPr/>
+                </a:tc>
+                <a:tc>
+                  <a:txBody>
+                    <a:bodyPr/>
+                    <a:lstStyle/>
+                    <a:p>
+                      <a:pPr latinLnBrk="1"/>
+                      <a:r>
+                        <a:rPr lang="ko-KR" altLang="en-US" dirty="0"/>
+                        <a:t>효과</a:t>
+                      </a:r>
+                    </a:p>
+                  </a:txBody>
+                  <a:tcPr/>
+                </a:tc>
+                <a:extLst>
+                  <a:ext uri="{0D108BD9-81ED-4DB2-BD59-A6C34878D82A}">
+                    <a16:rowId xmlns:a16="http://schemas.microsoft.com/office/drawing/2014/main" val="1945967960"/>
+                  </a:ext>
+                </a:extLst>
+              </a:tr>
+              <a:tr h="370840">
+                <a:tc>
+                  <a:txBody>
+                    <a:bodyPr/>
+                    <a:lstStyle/>
+                    <a:p>
+                      <a:pPr latinLnBrk="1"/>
+                      <a:r>
+                        <a:rPr lang="en-US" altLang="ko-KR" dirty="0"/>
+                        <a:t>I_E</a:t>
+                      </a:r>
+                      <a:endParaRPr lang="ko-KR" altLang="en-US" dirty="0"/>
+                    </a:p>
+                  </a:txBody>
+                  <a:tcPr/>
+                </a:tc>
+                <a:tc>
+                  <a:txBody>
+                    <a:bodyPr/>
+                    <a:lstStyle/>
+                    <a:p>
+                      <a:pPr latinLnBrk="1"/>
+                      <a:r>
+                        <a:rPr lang="en-US" altLang="ko-KR" dirty="0"/>
+                        <a:t>E</a:t>
+                      </a:r>
+                      <a:r>
+                        <a:rPr lang="ko-KR" altLang="en-US" dirty="0"/>
+                        <a:t>성향은 외로움을 크게 느낌</a:t>
+                      </a:r>
+                    </a:p>
+                  </a:txBody>
+                  <a:tcPr/>
+                </a:tc>
+                <a:extLst>
+                  <a:ext uri="{0D108BD9-81ED-4DB2-BD59-A6C34878D82A}">
+                    <a16:rowId xmlns:a16="http://schemas.microsoft.com/office/drawing/2014/main" val="2699579395"/>
+                  </a:ext>
+                </a:extLst>
+              </a:tr>
+              <a:tr h="370840">
+                <a:tc>
+                  <a:txBody>
+                    <a:bodyPr/>
+                    <a:lstStyle/>
+                    <a:p>
+                      <a:pPr latinLnBrk="1"/>
+                      <a:r>
+                        <a:rPr lang="en-US" altLang="ko-KR" dirty="0"/>
+                        <a:t>N_S</a:t>
+                      </a:r>
+                      <a:endParaRPr lang="ko-KR" altLang="en-US" dirty="0"/>
+                    </a:p>
+                  </a:txBody>
+                  <a:tcPr/>
+                </a:tc>
+                <a:tc>
+                  <a:txBody>
+                    <a:bodyPr/>
+                    <a:lstStyle/>
+                    <a:p>
+                      <a:pPr latinLnBrk="1"/>
+                      <a:r>
+                        <a:rPr lang="en-US" altLang="ko-KR" dirty="0"/>
+                        <a:t>N</a:t>
+                      </a:r>
+                      <a:r>
+                        <a:rPr lang="ko-KR" altLang="en-US" dirty="0"/>
+                        <a:t>성향은 </a:t>
+                      </a:r>
+                      <a:r>
+                        <a:rPr lang="en-US" altLang="ko-KR" dirty="0"/>
+                        <a:t>G</a:t>
+                      </a:r>
+                      <a:r>
+                        <a:rPr lang="ko-KR" altLang="en-US" dirty="0"/>
+                        <a:t> </a:t>
+                      </a:r>
+                      <a:r>
+                        <a:rPr lang="en-US" altLang="ko-KR" dirty="0"/>
+                        <a:t>Need</a:t>
+                      </a:r>
+                      <a:r>
+                        <a:rPr lang="ko-KR" altLang="en-US" dirty="0"/>
+                        <a:t>를 중시</a:t>
+                      </a:r>
+                      <a:r>
+                        <a:rPr lang="en-US" altLang="ko-KR" dirty="0"/>
+                        <a:t>, </a:t>
+                      </a:r>
+                      <a:r>
+                        <a:rPr lang="ko-KR" altLang="en-US" dirty="0"/>
+                        <a:t>추상적 기술 중시</a:t>
+                      </a:r>
+                      <a:r>
+                        <a:rPr lang="en-US" altLang="ko-KR" dirty="0"/>
+                        <a:t>,</a:t>
+                      </a:r>
+                    </a:p>
+                    <a:p>
+                      <a:pPr latinLnBrk="1"/>
+                      <a:r>
+                        <a:rPr lang="en-US" altLang="ko-KR" dirty="0"/>
+                        <a:t>S</a:t>
+                      </a:r>
+                      <a:r>
+                        <a:rPr lang="ko-KR" altLang="en-US" dirty="0"/>
+                        <a:t>성향은 현실 중시</a:t>
+                      </a:r>
+                      <a:r>
+                        <a:rPr lang="en-US" altLang="ko-KR" dirty="0"/>
+                        <a:t>, </a:t>
+                      </a:r>
+                      <a:r>
+                        <a:rPr lang="ko-KR" altLang="en-US" dirty="0"/>
+                        <a:t>실질적 기술 중시</a:t>
+                      </a:r>
+                    </a:p>
+                  </a:txBody>
+                  <a:tcPr/>
+                </a:tc>
+                <a:extLst>
+                  <a:ext uri="{0D108BD9-81ED-4DB2-BD59-A6C34878D82A}">
+                    <a16:rowId xmlns:a16="http://schemas.microsoft.com/office/drawing/2014/main" val="651678252"/>
+                  </a:ext>
+                </a:extLst>
+              </a:tr>
+              <a:tr h="370840">
+                <a:tc>
+                  <a:txBody>
+                    <a:bodyPr/>
+                    <a:lstStyle/>
+                    <a:p>
+                      <a:pPr latinLnBrk="1"/>
+                      <a:r>
+                        <a:rPr lang="en-US" altLang="ko-KR" dirty="0"/>
+                        <a:t>F_T</a:t>
+                      </a:r>
+                      <a:endParaRPr lang="ko-KR" altLang="en-US" dirty="0"/>
+                    </a:p>
+                  </a:txBody>
+                  <a:tcPr/>
+                </a:tc>
+                <a:tc>
+                  <a:txBody>
+                    <a:bodyPr/>
+                    <a:lstStyle/>
+                    <a:p>
+                      <a:pPr latinLnBrk="1"/>
+                      <a:r>
+                        <a:rPr lang="ko-KR" altLang="en-US" dirty="0"/>
+                        <a:t>미정</a:t>
+                      </a:r>
+                    </a:p>
+                  </a:txBody>
+                  <a:tcPr/>
+                </a:tc>
+                <a:extLst>
+                  <a:ext uri="{0D108BD9-81ED-4DB2-BD59-A6C34878D82A}">
+                    <a16:rowId xmlns:a16="http://schemas.microsoft.com/office/drawing/2014/main" val="270444625"/>
+                  </a:ext>
+                </a:extLst>
+              </a:tr>
+              <a:tr h="370840">
+                <a:tc>
+                  <a:txBody>
+                    <a:bodyPr/>
+                    <a:lstStyle/>
+                    <a:p>
+                      <a:pPr latinLnBrk="1"/>
+                      <a:r>
+                        <a:rPr lang="en-US" altLang="ko-KR" dirty="0"/>
+                        <a:t>P_J</a:t>
+                      </a:r>
+                      <a:endParaRPr lang="ko-KR" altLang="en-US" dirty="0"/>
+                    </a:p>
+                  </a:txBody>
+                  <a:tcPr/>
+                </a:tc>
+                <a:tc>
+                  <a:txBody>
+                    <a:bodyPr/>
+                    <a:lstStyle/>
+                    <a:p>
+                      <a:pPr latinLnBrk="1"/>
+                      <a:r>
+                        <a:rPr lang="ko-KR" altLang="en-US" dirty="0"/>
+                        <a:t>미정</a:t>
+                      </a:r>
+                    </a:p>
+                  </a:txBody>
+                  <a:tcPr/>
+                </a:tc>
+                <a:extLst>
+                  <a:ext uri="{0D108BD9-81ED-4DB2-BD59-A6C34878D82A}">
+                    <a16:rowId xmlns:a16="http://schemas.microsoft.com/office/drawing/2014/main" val="1802727067"/>
+                  </a:ext>
+                </a:extLst>
+              </a:tr>
+            </a:tbl>
+          </a:graphicData>
+        </a:graphic>
+      </p:graphicFrame>
+    </p:spTree>
+    <p:extLst>
+      <p:ext uri="{BB962C8B-B14F-4D97-AF65-F5344CB8AC3E}">
+        <p14:creationId xmlns:p14="http://schemas.microsoft.com/office/powerpoint/2010/main" val="220788839"/>
+      </p:ext>
+    </p:extLst>
+  </p:cSld>
+  <p:clrMapOvr>
+    <a:masterClrMapping/>
+  </p:clrMapOvr>
+</p:sld>
+</file>
+
+<file path=ppt/slides/slide16.xml><?xml version="1.0" encoding="utf-8"?>
+<p:sld xmlns:a="http://schemas.openxmlformats.org/drawingml/2006/main" xmlns:r="http://schemas.openxmlformats.org/officeDocument/2006/relationships" xmlns:p="http://schemas.openxmlformats.org/presentationml/2006/main">
+  <p:cSld>
+    <p:spTree>
+      <p:nvGrpSpPr>
+        <p:cNvPr id="1" name=""/>
+        <p:cNvGrpSpPr/>
+        <p:nvPr/>
+      </p:nvGrpSpPr>
+      <p:grpSpPr>
+        <a:xfrm>
+          <a:off x="0" y="0"/>
+          <a:ext cx="0" cy="0"/>
+          <a:chOff x="0" y="0"/>
+          <a:chExt cx="0" cy="0"/>
+        </a:xfrm>
+      </p:grpSpPr>
+      <p:sp>
+        <p:nvSpPr>
+          <p:cNvPr id="2" name="제목 1">
+            <a:extLst>
+              <a:ext uri="{FF2B5EF4-FFF2-40B4-BE49-F238E27FC236}">
                 <a16:creationId xmlns:a16="http://schemas.microsoft.com/office/drawing/2014/main" id="{071C4EB8-549C-09BD-20E9-EBA083C1110C}"/>
               </a:ext>
             </a:extLst>
@@ -4521,7 +5280,7 @@
 </p:sld>
 </file>
 
-<file path=ppt/slides/slide14.xml><?xml version="1.0" encoding="utf-8"?>
+<file path=ppt/slides/slide17.xml><?xml version="1.0" encoding="utf-8"?>
 <p:sld xmlns:a="http://schemas.openxmlformats.org/drawingml/2006/main" xmlns:r="http://schemas.openxmlformats.org/officeDocument/2006/relationships" xmlns:p="http://schemas.openxmlformats.org/presentationml/2006/main">
   <p:cSld>
     <p:spTree>
@@ -4862,7 +5621,7 @@
 </p:sld>
 </file>
 
-<file path=ppt/slides/slide15.xml><?xml version="1.0" encoding="utf-8"?>
+<file path=ppt/slides/slide18.xml><?xml version="1.0" encoding="utf-8"?>
 <p:sld xmlns:a="http://schemas.openxmlformats.org/drawingml/2006/main" xmlns:r="http://schemas.openxmlformats.org/officeDocument/2006/relationships" xmlns:p="http://schemas.openxmlformats.org/presentationml/2006/main">
   <p:cSld>
     <p:spTree>
@@ -4992,7 +5751,7 @@
 </p:sld>
 </file>
 
-<file path=ppt/slides/slide16.xml><?xml version="1.0" encoding="utf-8"?>
+<file path=ppt/slides/slide19.xml><?xml version="1.0" encoding="utf-8"?>
 <p:sld xmlns:a="http://schemas.openxmlformats.org/drawingml/2006/main" xmlns:r="http://schemas.openxmlformats.org/officeDocument/2006/relationships" xmlns:p="http://schemas.openxmlformats.org/presentationml/2006/main">
   <p:cSld>
     <p:spTree>
@@ -5118,7 +5877,208 @@
 </p:sld>
 </file>
 
-<file path=ppt/slides/slide17.xml><?xml version="1.0" encoding="utf-8"?>
+<file path=ppt/slides/slide2.xml><?xml version="1.0" encoding="utf-8"?>
+<p:sld xmlns:a="http://schemas.openxmlformats.org/drawingml/2006/main" xmlns:r="http://schemas.openxmlformats.org/officeDocument/2006/relationships" xmlns:p="http://schemas.openxmlformats.org/presentationml/2006/main">
+  <p:cSld>
+    <p:spTree>
+      <p:nvGrpSpPr>
+        <p:cNvPr id="1" name=""/>
+        <p:cNvGrpSpPr/>
+        <p:nvPr/>
+      </p:nvGrpSpPr>
+      <p:grpSpPr>
+        <a:xfrm>
+          <a:off x="0" y="0"/>
+          <a:ext cx="0" cy="0"/>
+          <a:chOff x="0" y="0"/>
+          <a:chExt cx="0" cy="0"/>
+        </a:xfrm>
+      </p:grpSpPr>
+      <p:sp>
+        <p:nvSpPr>
+          <p:cNvPr id="2" name="제목 1">
+            <a:extLst>
+              <a:ext uri="{FF2B5EF4-FFF2-40B4-BE49-F238E27FC236}">
+                <a16:creationId xmlns:a16="http://schemas.microsoft.com/office/drawing/2014/main" id="{D8C48D68-A6BA-27D3-C88E-2C06B10FC392}"/>
+              </a:ext>
+            </a:extLst>
+          </p:cNvPr>
+          <p:cNvSpPr>
+            <a:spLocks noGrp="1"/>
+          </p:cNvSpPr>
+          <p:nvPr>
+            <p:ph type="title"/>
+          </p:nvPr>
+        </p:nvSpPr>
+        <p:spPr/>
+        <p:txBody>
+          <a:bodyPr/>
+          <a:lstStyle/>
+          <a:p>
+            <a:r>
+              <a:rPr lang="en-US" altLang="ko-KR" dirty="0"/>
+              <a:t>Utility AI</a:t>
+            </a:r>
+            <a:r>
+              <a:rPr lang="ko-KR" altLang="en-US" dirty="0"/>
+              <a:t>란</a:t>
+            </a:r>
+            <a:r>
+              <a:rPr lang="en-US" altLang="ko-KR" dirty="0"/>
+              <a:t>?</a:t>
+            </a:r>
+            <a:endParaRPr lang="ko-KR" altLang="en-US" dirty="0"/>
+          </a:p>
+        </p:txBody>
+      </p:sp>
+      <p:pic>
+        <p:nvPicPr>
+          <p:cNvPr id="5" name="내용 개체 틀 4">
+            <a:extLst>
+              <a:ext uri="{FF2B5EF4-FFF2-40B4-BE49-F238E27FC236}">
+                <a16:creationId xmlns:a16="http://schemas.microsoft.com/office/drawing/2014/main" id="{665D4722-19C6-5AAB-FAFF-80FBF9F298EC}"/>
+              </a:ext>
+            </a:extLst>
+          </p:cNvPr>
+          <p:cNvPicPr>
+            <a:picLocks noGrp="1" noChangeAspect="1"/>
+          </p:cNvPicPr>
+          <p:nvPr>
+            <p:ph idx="1"/>
+          </p:nvPr>
+        </p:nvPicPr>
+        <p:blipFill>
+          <a:blip r:embed="rId2">
+            <a:extLst>
+              <a:ext uri="{28A0092B-C50C-407E-A947-70E740481C1C}">
+                <a14:useLocalDpi xmlns:a14="http://schemas.microsoft.com/office/drawing/2010/main" val="0"/>
+              </a:ext>
+              <a:ext uri="{837473B0-CC2E-450A-ABE3-18F120FF3D39}">
+                <a1611:picAttrSrcUrl xmlns:a1611="http://schemas.microsoft.com/office/drawing/2016/11/main" r:id="rId3"/>
+              </a:ext>
+            </a:extLst>
+          </a:blip>
+          <a:stretch>
+            <a:fillRect/>
+          </a:stretch>
+        </p:blipFill>
+        <p:spPr>
+          <a:xfrm>
+            <a:off x="7465102" y="1397039"/>
+            <a:ext cx="2980896" cy="4206806"/>
+          </a:xfrm>
+        </p:spPr>
+      </p:pic>
+      <p:sp>
+        <p:nvSpPr>
+          <p:cNvPr id="7" name="TextBox 6">
+            <a:extLst>
+              <a:ext uri="{FF2B5EF4-FFF2-40B4-BE49-F238E27FC236}">
+                <a16:creationId xmlns:a16="http://schemas.microsoft.com/office/drawing/2014/main" id="{C6630B73-938B-AEA6-1B18-EFBCA2196860}"/>
+              </a:ext>
+            </a:extLst>
+          </p:cNvPr>
+          <p:cNvSpPr txBox="1"/>
+          <p:nvPr/>
+        </p:nvSpPr>
+        <p:spPr>
+          <a:xfrm>
+            <a:off x="914048" y="2623279"/>
+            <a:ext cx="4864309" cy="1754326"/>
+          </a:xfrm>
+          <a:prstGeom prst="rect">
+            <a:avLst/>
+          </a:prstGeom>
+          <a:noFill/>
+        </p:spPr>
+        <p:txBody>
+          <a:bodyPr wrap="square" rtlCol="0">
+            <a:spAutoFit/>
+          </a:bodyPr>
+          <a:lstStyle/>
+          <a:p>
+            <a:r>
+              <a:rPr lang="ko-KR" altLang="en-US" dirty="0"/>
+              <a:t>게임 </a:t>
+            </a:r>
+            <a:r>
+              <a:rPr lang="en-US" altLang="ko-KR" dirty="0"/>
+              <a:t>NPC</a:t>
+            </a:r>
+            <a:r>
+              <a:rPr lang="ko-KR" altLang="en-US" dirty="0"/>
+              <a:t>를 위한 인공지능의 한 종류로</a:t>
+            </a:r>
+            <a:endParaRPr lang="en-US" altLang="ko-KR" dirty="0"/>
+          </a:p>
+          <a:p>
+            <a:r>
+              <a:rPr lang="ko-KR" altLang="en-US" dirty="0"/>
+              <a:t>유용성</a:t>
+            </a:r>
+            <a:r>
+              <a:rPr lang="en-US" altLang="ko-KR" dirty="0"/>
+              <a:t>(Utility) </a:t>
+            </a:r>
+            <a:r>
+              <a:rPr lang="ko-KR" altLang="en-US" dirty="0"/>
+              <a:t>를 평가하여 가장 최적의 행동을 하도록 돕는 </a:t>
+            </a:r>
+            <a:r>
+              <a:rPr lang="en-US" altLang="ko-KR" dirty="0"/>
+              <a:t>AI</a:t>
+            </a:r>
+            <a:r>
+              <a:rPr lang="ko-KR" altLang="en-US" dirty="0"/>
+              <a:t>이다</a:t>
+            </a:r>
+            <a:r>
+              <a:rPr lang="en-US" altLang="ko-KR" dirty="0"/>
+              <a:t>. </a:t>
+            </a:r>
+          </a:p>
+          <a:p>
+            <a:endParaRPr lang="en-US" altLang="ko-KR" dirty="0"/>
+          </a:p>
+          <a:p>
+            <a:r>
+              <a:rPr lang="en-US" altLang="ko-KR" dirty="0"/>
+              <a:t>Utility AI</a:t>
+            </a:r>
+            <a:r>
+              <a:rPr lang="ko-KR" altLang="en-US" dirty="0"/>
+              <a:t>를 사용한 대표적인 게임으로 </a:t>
+            </a:r>
+            <a:r>
+              <a:rPr lang="ko-KR" altLang="en-US" dirty="0" err="1"/>
+              <a:t>심즈가</a:t>
+            </a:r>
+            <a:r>
+              <a:rPr lang="ko-KR" altLang="en-US" dirty="0"/>
+              <a:t> 있다</a:t>
+            </a:r>
+            <a:r>
+              <a:rPr lang="en-US" altLang="ko-KR" dirty="0"/>
+              <a:t>.</a:t>
+            </a:r>
+            <a:endParaRPr lang="ko-KR" altLang="en-US" dirty="0"/>
+          </a:p>
+        </p:txBody>
+      </p:sp>
+    </p:spTree>
+    <p:extLst>
+      <p:ext uri="{BB962C8B-B14F-4D97-AF65-F5344CB8AC3E}">
+        <p14:creationId xmlns:p14="http://schemas.microsoft.com/office/powerpoint/2010/main" val="2948608975"/>
+      </p:ext>
+    </p:extLst>
+  </p:cSld>
+  <p:clrMapOvr>
+    <a:masterClrMapping/>
+  </p:clrMapOvr>
+</p:sld>
+</file>
+
+<file path=ppt/slides/slide20.xml><?xml version="1.0" encoding="utf-8"?>
 <p:sld xmlns:a="http://schemas.openxmlformats.org/drawingml/2006/main" xmlns:r="http://schemas.openxmlformats.org/officeDocument/2006/relationships" xmlns:p="http://schemas.openxmlformats.org/presentationml/2006/main">
   <p:cSld>
     <p:spTree>
@@ -5300,7 +6260,7 @@
 </p:sld>
 </file>
 
-<file path=ppt/slides/slide18.xml><?xml version="1.0" encoding="utf-8"?>
+<file path=ppt/slides/slide21.xml><?xml version="1.0" encoding="utf-8"?>
 <p:sld xmlns:a="http://schemas.openxmlformats.org/drawingml/2006/main" xmlns:r="http://schemas.openxmlformats.org/officeDocument/2006/relationships" xmlns:p="http://schemas.openxmlformats.org/presentationml/2006/main">
   <p:cSld>
     <p:spTree>
@@ -5353,10 +6313,10 @@
       </p:sp>
       <p:pic>
         <p:nvPicPr>
-          <p:cNvPr id="6" name="내용 개체 틀 5">
-            <a:extLst>
-              <a:ext uri="{FF2B5EF4-FFF2-40B4-BE49-F238E27FC236}">
-                <a16:creationId xmlns:a16="http://schemas.microsoft.com/office/drawing/2014/main" id="{00DF97F7-7916-D179-3796-7384A5253F65}"/>
+          <p:cNvPr id="10" name="그림 개체 틀 9">
+            <a:extLst>
+              <a:ext uri="{FF2B5EF4-FFF2-40B4-BE49-F238E27FC236}">
+                <a16:creationId xmlns:a16="http://schemas.microsoft.com/office/drawing/2014/main" id="{3490A8FF-BACF-DAC7-9B0F-8220D60F2D19}"/>
               </a:ext>
             </a:extLst>
           </p:cNvPr>
@@ -5364,7 +6324,7 @@
             <a:picLocks noGrp="1" noChangeAspect="1"/>
           </p:cNvPicPr>
           <p:nvPr>
-            <p:ph idx="1"/>
+            <p:ph type="pic" idx="1"/>
           </p:nvPr>
         </p:nvPicPr>
         <p:blipFill>
@@ -5375,14 +6335,15 @@
               </a:ext>
             </a:extLst>
           </a:blip>
+          <a:srcRect l="34352" r="33894" b="28358"/>
           <a:stretch>
             <a:fillRect/>
           </a:stretch>
         </p:blipFill>
         <p:spPr>
           <a:xfrm>
-            <a:off x="7184854" y="1690688"/>
-            <a:ext cx="4168946" cy="4351338"/>
+            <a:off x="6152826" y="754949"/>
+            <a:ext cx="4912963" cy="5561971"/>
           </a:xfrm>
           <a:prstGeom prst="rect">
             <a:avLst/>
@@ -5391,30 +6352,23 @@
       </p:pic>
       <p:sp>
         <p:nvSpPr>
-          <p:cNvPr id="7" name="TextBox 6">
-            <a:extLst>
-              <a:ext uri="{FF2B5EF4-FFF2-40B4-BE49-F238E27FC236}">
-                <a16:creationId xmlns:a16="http://schemas.microsoft.com/office/drawing/2014/main" id="{94A0DBB7-922C-8F94-1704-264DAB31F0DB}"/>
-              </a:ext>
-            </a:extLst>
-          </p:cNvPr>
-          <p:cNvSpPr txBox="1"/>
-          <p:nvPr/>
-        </p:nvSpPr>
-        <p:spPr>
-          <a:xfrm>
-            <a:off x="1146747" y="3543191"/>
-            <a:ext cx="5433934" cy="646331"/>
-          </a:xfrm>
-          <a:prstGeom prst="rect">
-            <a:avLst/>
-          </a:prstGeom>
-          <a:noFill/>
-        </p:spPr>
-        <p:txBody>
-          <a:bodyPr wrap="square" rtlCol="0">
-            <a:spAutoFit/>
-          </a:bodyPr>
+          <p:cNvPr id="8" name="텍스트 개체 틀 7">
+            <a:extLst>
+              <a:ext uri="{FF2B5EF4-FFF2-40B4-BE49-F238E27FC236}">
+                <a16:creationId xmlns:a16="http://schemas.microsoft.com/office/drawing/2014/main" id="{7CBA991C-D633-91B8-A97E-BF8EE0200F79}"/>
+              </a:ext>
+            </a:extLst>
+          </p:cNvPr>
+          <p:cNvSpPr>
+            <a:spLocks noGrp="1"/>
+          </p:cNvSpPr>
+          <p:nvPr>
+            <p:ph type="body" sz="half" idx="2"/>
+          </p:nvPr>
+        </p:nvSpPr>
+        <p:spPr/>
+        <p:txBody>
+          <a:bodyPr/>
           <a:lstStyle/>
           <a:p>
             <a:pPr marL="285750" indent="-285750">
@@ -5423,7 +6377,53 @@
             </a:pPr>
             <a:r>
               <a:rPr lang="ko-KR" altLang="en-US" dirty="0"/>
-              <a:t>타원을 향해 던져진 공이 타원에 적중할 확률을 계산하여 이 확률을 매력도로 봄</a:t>
+              <a:t>던져진 공이 상대의 이상형의 스트라이크 </a:t>
+            </a:r>
+            <a:r>
+              <a:rPr lang="ko-KR" altLang="en-US" dirty="0" err="1"/>
+              <a:t>존에</a:t>
+            </a:r>
+            <a:r>
+              <a:rPr lang="ko-KR" altLang="en-US" dirty="0"/>
+              <a:t> 들어갈 확률로 상대에 대한 매력도를 결정함</a:t>
+            </a:r>
+            <a:endParaRPr lang="en-US" altLang="ko-KR" dirty="0"/>
+          </a:p>
+          <a:p>
+            <a:pPr marL="285750" indent="-285750">
+              <a:buFont typeface="Arial" panose="020B0604020202020204" pitchFamily="34" charset="0"/>
+              <a:buChar char="•"/>
+            </a:pPr>
+            <a:r>
+              <a:rPr lang="ko-KR" altLang="en-US" dirty="0"/>
+              <a:t>모든 </a:t>
+            </a:r>
+            <a:r>
+              <a:rPr lang="en-US" altLang="ko-KR" dirty="0"/>
+              <a:t>AI</a:t>
+            </a:r>
+            <a:r>
+              <a:rPr lang="ko-KR" altLang="en-US" dirty="0"/>
+              <a:t>는 이상형의 벡터와 외모 벡터를 가지고 있어서 두 벡터가 이루는 각도가 작을 수록 확률이 커짐</a:t>
+            </a:r>
+            <a:endParaRPr lang="en-US" altLang="ko-KR" dirty="0"/>
+          </a:p>
+          <a:p>
+            <a:pPr marL="285750" indent="-285750">
+              <a:buFont typeface="Arial" panose="020B0604020202020204" pitchFamily="34" charset="0"/>
+              <a:buChar char="•"/>
+            </a:pPr>
+            <a:r>
+              <a:rPr lang="ko-KR" altLang="en-US" dirty="0"/>
+              <a:t>외모가 뛰어난 </a:t>
+            </a:r>
+            <a:r>
+              <a:rPr lang="en-US" altLang="ko-KR" dirty="0"/>
+              <a:t>AI</a:t>
+            </a:r>
+            <a:r>
+              <a:rPr lang="ko-KR" altLang="en-US" dirty="0"/>
+              <a:t>일수록 점의 분포가 원점에 가까워지므로 매력도가 커짐</a:t>
             </a:r>
             <a:endParaRPr lang="en-US" altLang="ko-KR" dirty="0"/>
           </a:p>
@@ -5442,7 +6442,7 @@
 </p:sld>
 </file>
 
-<file path=ppt/slides/slide19.xml><?xml version="1.0" encoding="utf-8"?>
+<file path=ppt/slides/slide22.xml><?xml version="1.0" encoding="utf-8"?>
 <p:sld xmlns:a="http://schemas.openxmlformats.org/drawingml/2006/main" xmlns:r="http://schemas.openxmlformats.org/officeDocument/2006/relationships" xmlns:p="http://schemas.openxmlformats.org/presentationml/2006/main">
   <p:cSld>
     <p:spTree>
@@ -5555,7 +6555,7 @@
 </p:sld>
 </file>
 
-<file path=ppt/slides/slide2.xml><?xml version="1.0" encoding="utf-8"?>
+<file path=ppt/slides/slide23.xml><?xml version="1.0" encoding="utf-8"?>
 <p:sld xmlns:a="http://schemas.openxmlformats.org/drawingml/2006/main" xmlns:r="http://schemas.openxmlformats.org/officeDocument/2006/relationships" xmlns:p="http://schemas.openxmlformats.org/presentationml/2006/main">
   <p:cSld>
     <p:spTree>
@@ -5577,7 +6577,7 @@
           <p:cNvPr id="2" name="제목 1">
             <a:extLst>
               <a:ext uri="{FF2B5EF4-FFF2-40B4-BE49-F238E27FC236}">
-                <a16:creationId xmlns:a16="http://schemas.microsoft.com/office/drawing/2014/main" id="{D8C48D68-A6BA-27D3-C88E-2C06B10FC392}"/>
+                <a16:creationId xmlns:a16="http://schemas.microsoft.com/office/drawing/2014/main" id="{ED386F6A-A099-09A9-D605-C2DABAA3C87F}"/>
               </a:ext>
             </a:extLst>
           </p:cNvPr>
@@ -5594,159 +6594,45 @@
           <a:lstStyle/>
           <a:p>
             <a:r>
-              <a:rPr lang="en-US" altLang="ko-KR" dirty="0"/>
-              <a:t>Utility AI</a:t>
-            </a:r>
-            <a:r>
-              <a:rPr lang="ko-KR" altLang="en-US" dirty="0"/>
-              <a:t>란</a:t>
-            </a:r>
-            <a:r>
-              <a:rPr lang="en-US" altLang="ko-KR" dirty="0"/>
-              <a:t>?</a:t>
-            </a:r>
-            <a:endParaRPr lang="ko-KR" altLang="en-US" dirty="0"/>
-          </a:p>
-        </p:txBody>
-      </p:sp>
-      <p:pic>
-        <p:nvPicPr>
-          <p:cNvPr id="5" name="내용 개체 틀 4">
-            <a:extLst>
-              <a:ext uri="{FF2B5EF4-FFF2-40B4-BE49-F238E27FC236}">
-                <a16:creationId xmlns:a16="http://schemas.microsoft.com/office/drawing/2014/main" id="{665D4722-19C6-5AAB-FAFF-80FBF9F298EC}"/>
-              </a:ext>
-            </a:extLst>
-          </p:cNvPr>
-          <p:cNvPicPr>
-            <a:picLocks noGrp="1" noChangeAspect="1"/>
-          </p:cNvPicPr>
+              <a:rPr lang="ko-KR" altLang="en-US" dirty="0"/>
+              <a:t>검증 방법</a:t>
+            </a:r>
+          </a:p>
+        </p:txBody>
+      </p:sp>
+      <p:sp>
+        <p:nvSpPr>
+          <p:cNvPr id="3" name="내용 개체 틀 2">
+            <a:extLst>
+              <a:ext uri="{FF2B5EF4-FFF2-40B4-BE49-F238E27FC236}">
+                <a16:creationId xmlns:a16="http://schemas.microsoft.com/office/drawing/2014/main" id="{C01CA6A2-78B8-F444-9130-94B50B45E343}"/>
+              </a:ext>
+            </a:extLst>
+          </p:cNvPr>
+          <p:cNvSpPr>
+            <a:spLocks noGrp="1"/>
+          </p:cNvSpPr>
           <p:nvPr>
             <p:ph idx="1"/>
           </p:nvPr>
-        </p:nvPicPr>
-        <p:blipFill>
-          <a:blip r:embed="rId2">
-            <a:extLst>
-              <a:ext uri="{28A0092B-C50C-407E-A947-70E740481C1C}">
-                <a14:useLocalDpi xmlns:a14="http://schemas.microsoft.com/office/drawing/2010/main" val="0"/>
-              </a:ext>
-              <a:ext uri="{837473B0-CC2E-450A-ABE3-18F120FF3D39}">
-                <a1611:picAttrSrcUrl xmlns:a1611="http://schemas.microsoft.com/office/drawing/2016/11/main" r:id="rId3"/>
-              </a:ext>
-            </a:extLst>
-          </a:blip>
-          <a:stretch>
-            <a:fillRect/>
-          </a:stretch>
-        </p:blipFill>
-        <p:spPr>
-          <a:xfrm>
-            <a:off x="7465102" y="1397039"/>
-            <a:ext cx="2980896" cy="4206806"/>
-          </a:xfrm>
-        </p:spPr>
-      </p:pic>
-      <p:sp>
-        <p:nvSpPr>
-          <p:cNvPr id="7" name="TextBox 6">
-            <a:extLst>
-              <a:ext uri="{FF2B5EF4-FFF2-40B4-BE49-F238E27FC236}">
-                <a16:creationId xmlns:a16="http://schemas.microsoft.com/office/drawing/2014/main" id="{C6630B73-938B-AEA6-1B18-EFBCA2196860}"/>
-              </a:ext>
-            </a:extLst>
-          </p:cNvPr>
-          <p:cNvSpPr txBox="1"/>
-          <p:nvPr/>
-        </p:nvSpPr>
-        <p:spPr>
-          <a:xfrm>
-            <a:off x="914048" y="2623279"/>
-            <a:ext cx="4864309" cy="1754326"/>
-          </a:xfrm>
-          <a:prstGeom prst="rect">
-            <a:avLst/>
-          </a:prstGeom>
-          <a:noFill/>
-        </p:spPr>
-        <p:txBody>
-          <a:bodyPr wrap="square" rtlCol="0">
-            <a:spAutoFit/>
-          </a:bodyPr>
-          <a:lstStyle/>
-          <a:p>
-            <a:r>
-              <a:rPr lang="ko-KR" altLang="en-US" dirty="0"/>
-              <a:t>게임 </a:t>
-            </a:r>
-            <a:r>
-              <a:rPr lang="en-US" altLang="ko-KR" dirty="0"/>
-              <a:t>NPC</a:t>
-            </a:r>
-            <a:r>
-              <a:rPr lang="ko-KR" altLang="en-US" dirty="0"/>
-              <a:t>를 위한 인공지능의 한 종류로</a:t>
+        </p:nvSpPr>
+        <p:spPr/>
+        <p:txBody>
+          <a:bodyPr/>
+          <a:lstStyle/>
+          <a:p>
+            <a:r>
+              <a:rPr lang="ko-KR" altLang="en-US" dirty="0"/>
+              <a:t>다양한 시스템을 검증하기 위해 로그를 분석하는 파이썬 코드를 준비함</a:t>
             </a:r>
             <a:endParaRPr lang="en-US" altLang="ko-KR" dirty="0"/>
-          </a:p>
-          <a:p>
-            <a:r>
-              <a:rPr lang="ko-KR" altLang="en-US" dirty="0"/>
-              <a:t>유용성</a:t>
-            </a:r>
-            <a:r>
-              <a:rPr lang="en-US" altLang="ko-KR" dirty="0"/>
-              <a:t>(Utility) </a:t>
-            </a:r>
-            <a:r>
-              <a:rPr lang="ko-KR" altLang="en-US" dirty="0"/>
-              <a:t>를 평가하여 가장 최적의 행동을 하도록 돕는 </a:t>
-            </a:r>
-            <a:r>
-              <a:rPr lang="en-US" altLang="ko-KR" dirty="0"/>
-              <a:t>AI</a:t>
-            </a:r>
-            <a:r>
-              <a:rPr lang="ko-KR" altLang="en-US" dirty="0"/>
-              <a:t>이다</a:t>
-            </a:r>
-            <a:r>
-              <a:rPr lang="en-US" altLang="ko-KR" dirty="0"/>
-              <a:t>. </a:t>
-            </a:r>
-          </a:p>
-          <a:p>
-            <a:endParaRPr lang="en-US" altLang="ko-KR" dirty="0"/>
-          </a:p>
-          <a:p>
-            <a:r>
-              <a:rPr lang="en-US" altLang="ko-KR" dirty="0"/>
-              <a:t>Utility AI</a:t>
-            </a:r>
-            <a:r>
-              <a:rPr lang="ko-KR" altLang="en-US" dirty="0"/>
-              <a:t>를 사용한 대표적인 게임으로 </a:t>
-            </a:r>
-            <a:r>
-              <a:rPr lang="ko-KR" altLang="en-US" dirty="0" err="1"/>
-              <a:t>심즈가</a:t>
-            </a:r>
-            <a:r>
-              <a:rPr lang="ko-KR" altLang="en-US" dirty="0"/>
-              <a:t> 있다</a:t>
-            </a:r>
-            <a:r>
-              <a:rPr lang="en-US" altLang="ko-KR" dirty="0"/>
-              <a:t>.</a:t>
-            </a:r>
-            <a:endParaRPr lang="ko-KR" altLang="en-US" dirty="0"/>
           </a:p>
         </p:txBody>
       </p:sp>
     </p:spTree>
     <p:extLst>
       <p:ext uri="{BB962C8B-B14F-4D97-AF65-F5344CB8AC3E}">
-        <p14:creationId xmlns:p14="http://schemas.microsoft.com/office/powerpoint/2010/main" val="2948608975"/>
+        <p14:creationId xmlns:p14="http://schemas.microsoft.com/office/powerpoint/2010/main" val="3987587229"/>
       </p:ext>
     </p:extLst>
   </p:cSld>
@@ -5756,7 +6642,7 @@
 </p:sld>
 </file>
 
-<file path=ppt/slides/slide20.xml><?xml version="1.0" encoding="utf-8"?>
+<file path=ppt/slides/slide24.xml><?xml version="1.0" encoding="utf-8"?>
 <p:sld xmlns:a="http://schemas.openxmlformats.org/drawingml/2006/main" xmlns:r="http://schemas.openxmlformats.org/officeDocument/2006/relationships" xmlns:p="http://schemas.openxmlformats.org/presentationml/2006/main">
   <p:cSld>
     <p:spTree>
@@ -5778,7 +6664,7 @@
           <p:cNvPr id="2" name="제목 1">
             <a:extLst>
               <a:ext uri="{FF2B5EF4-FFF2-40B4-BE49-F238E27FC236}">
-                <a16:creationId xmlns:a16="http://schemas.microsoft.com/office/drawing/2014/main" id="{ED386F6A-A099-09A9-D605-C2DABAA3C87F}"/>
+                <a16:creationId xmlns:a16="http://schemas.microsoft.com/office/drawing/2014/main" id="{63D1E033-F28D-F27D-F2B7-5D71A8FF3D3A}"/>
               </a:ext>
             </a:extLst>
           </p:cNvPr>
@@ -5796,7 +6682,7 @@
           <a:p>
             <a:r>
               <a:rPr lang="ko-KR" altLang="en-US" dirty="0"/>
-              <a:t>검증 방법</a:t>
+              <a:t>시연</a:t>
             </a:r>
           </a:p>
         </p:txBody>
@@ -5806,7 +6692,7 @@
           <p:cNvPr id="3" name="내용 개체 틀 2">
             <a:extLst>
               <a:ext uri="{FF2B5EF4-FFF2-40B4-BE49-F238E27FC236}">
-                <a16:creationId xmlns:a16="http://schemas.microsoft.com/office/drawing/2014/main" id="{C01CA6A2-78B8-F444-9130-94B50B45E343}"/>
+                <a16:creationId xmlns:a16="http://schemas.microsoft.com/office/drawing/2014/main" id="{6DA16056-EE15-D893-FDA1-7CF8BE83172C}"/>
               </a:ext>
             </a:extLst>
           </p:cNvPr>
@@ -5822,18 +6708,14 @@
           <a:bodyPr/>
           <a:lstStyle/>
           <a:p>
-            <a:r>
-              <a:rPr lang="ko-KR" altLang="en-US" dirty="0"/>
-              <a:t>다양한 시스템을 검증하기 위해 로그를 분석하는 파이썬 코드를 준비함</a:t>
-            </a:r>
-            <a:endParaRPr lang="en-US" altLang="ko-KR" dirty="0"/>
+            <a:endParaRPr lang="ko-KR" altLang="en-US" dirty="0"/>
           </a:p>
         </p:txBody>
       </p:sp>
     </p:spTree>
     <p:extLst>
       <p:ext uri="{BB962C8B-B14F-4D97-AF65-F5344CB8AC3E}">
-        <p14:creationId xmlns:p14="http://schemas.microsoft.com/office/powerpoint/2010/main" val="3987587229"/>
+        <p14:creationId xmlns:p14="http://schemas.microsoft.com/office/powerpoint/2010/main" val="1280422250"/>
       </p:ext>
     </p:extLst>
   </p:cSld>
@@ -5843,7 +6725,7 @@
 </p:sld>
 </file>
 
-<file path=ppt/slides/slide21.xml><?xml version="1.0" encoding="utf-8"?>
+<file path=ppt/slides/slide25.xml><?xml version="1.0" encoding="utf-8"?>
 <p:sld xmlns:a="http://schemas.openxmlformats.org/drawingml/2006/main" xmlns:r="http://schemas.openxmlformats.org/officeDocument/2006/relationships" xmlns:p="http://schemas.openxmlformats.org/presentationml/2006/main">
   <p:cSld>
     <p:spTree>
@@ -5865,7 +6747,7 @@
           <p:cNvPr id="2" name="제목 1">
             <a:extLst>
               <a:ext uri="{FF2B5EF4-FFF2-40B4-BE49-F238E27FC236}">
-                <a16:creationId xmlns:a16="http://schemas.microsoft.com/office/drawing/2014/main" id="{63D1E033-F28D-F27D-F2B7-5D71A8FF3D3A}"/>
+                <a16:creationId xmlns:a16="http://schemas.microsoft.com/office/drawing/2014/main" id="{9D2A2841-ACA8-2CCD-1268-463B855D603C}"/>
               </a:ext>
             </a:extLst>
           </p:cNvPr>
@@ -5882,9 +6764,10 @@
           <a:lstStyle/>
           <a:p>
             <a:r>
-              <a:rPr lang="ko-KR" altLang="en-US" dirty="0"/>
-              <a:t>시연</a:t>
-            </a:r>
+              <a:rPr lang="ko-KR" altLang="en-US" dirty="0" err="1"/>
+              <a:t>배운점</a:t>
+            </a:r>
+            <a:endParaRPr lang="ko-KR" altLang="en-US" dirty="0"/>
           </a:p>
         </p:txBody>
       </p:sp>
@@ -5893,7 +6776,7 @@
           <p:cNvPr id="3" name="내용 개체 틀 2">
             <a:extLst>
               <a:ext uri="{FF2B5EF4-FFF2-40B4-BE49-F238E27FC236}">
-                <a16:creationId xmlns:a16="http://schemas.microsoft.com/office/drawing/2014/main" id="{6DA16056-EE15-D893-FDA1-7CF8BE83172C}"/>
+                <a16:creationId xmlns:a16="http://schemas.microsoft.com/office/drawing/2014/main" id="{A9D62350-8590-933A-8B89-A3D0C2278533}"/>
               </a:ext>
             </a:extLst>
           </p:cNvPr>
@@ -5909,14 +6792,18 @@
           <a:bodyPr/>
           <a:lstStyle/>
           <a:p>
-            <a:endParaRPr lang="ko-KR" altLang="en-US" dirty="0"/>
+            <a:r>
+              <a:rPr lang="ko-KR" altLang="en-US" dirty="0"/>
+              <a:t>감에 의존한 개발은 오히려 효율이 나쁘다</a:t>
+            </a:r>
+            <a:endParaRPr lang="en-US" altLang="ko-KR" dirty="0"/>
           </a:p>
         </p:txBody>
       </p:sp>
     </p:spTree>
     <p:extLst>
       <p:ext uri="{BB962C8B-B14F-4D97-AF65-F5344CB8AC3E}">
-        <p14:creationId xmlns:p14="http://schemas.microsoft.com/office/powerpoint/2010/main" val="1280422250"/>
+        <p14:creationId xmlns:p14="http://schemas.microsoft.com/office/powerpoint/2010/main" val="453276382"/>
       </p:ext>
     </p:extLst>
   </p:cSld>
@@ -5991,6 +6878,16 @@
         <p:txBody>
           <a:bodyPr/>
           <a:lstStyle/>
+          <a:p>
+            <a:r>
+              <a:rPr lang="ko-KR" altLang="en-US" dirty="0"/>
+              <a:t>시스템의 목표는 무엇인가</a:t>
+            </a:r>
+            <a:r>
+              <a:rPr lang="en-US" altLang="ko-KR" dirty="0"/>
+              <a:t>?</a:t>
+            </a:r>
+          </a:p>
           <a:p>
             <a:r>
               <a:rPr lang="ko-KR" altLang="en-US" dirty="0"/>
@@ -6059,7 +6956,7 @@
           <p:cNvPr id="2" name="제목 1">
             <a:extLst>
               <a:ext uri="{FF2B5EF4-FFF2-40B4-BE49-F238E27FC236}">
-                <a16:creationId xmlns:a16="http://schemas.microsoft.com/office/drawing/2014/main" id="{36B9A922-8837-47E3-F4E0-66233088315A}"/>
+                <a16:creationId xmlns:a16="http://schemas.microsoft.com/office/drawing/2014/main" id="{733C4658-5AB0-A51A-0113-09AA8A315979}"/>
               </a:ext>
             </a:extLst>
           </p:cNvPr>
@@ -6077,7 +6974,7 @@
           <a:p>
             <a:r>
               <a:rPr lang="ko-KR" altLang="en-US" dirty="0"/>
-              <a:t>행동 평가 설계</a:t>
+              <a:t>시스템의 목표</a:t>
             </a:r>
           </a:p>
         </p:txBody>
@@ -6087,7 +6984,7 @@
           <p:cNvPr id="3" name="내용 개체 틀 2">
             <a:extLst>
               <a:ext uri="{FF2B5EF4-FFF2-40B4-BE49-F238E27FC236}">
-                <a16:creationId xmlns:a16="http://schemas.microsoft.com/office/drawing/2014/main" id="{E2222103-659B-3CE1-F791-C356DE1E9BF8}"/>
+                <a16:creationId xmlns:a16="http://schemas.microsoft.com/office/drawing/2014/main" id="{F6C63158-7C1D-5BDA-0341-A3B3C490CA10}"/>
               </a:ext>
             </a:extLst>
           </p:cNvPr>
@@ -6105,14 +7002,22 @@
           <a:p>
             <a:r>
               <a:rPr lang="ko-KR" altLang="en-US" dirty="0"/>
-              <a:t>모든 액션에는 결과값이 존재</a:t>
+              <a:t>현실적인 인간의 생활 혹은 인간관계를 표현하는 시스템</a:t>
             </a:r>
             <a:endParaRPr lang="en-US" altLang="ko-KR" dirty="0"/>
           </a:p>
           <a:p>
             <a:r>
               <a:rPr lang="ko-KR" altLang="en-US" dirty="0"/>
-              <a:t>스킬의 경험치</a:t>
+              <a:t>스스로 자신에게 필요한 것</a:t>
+            </a:r>
+            <a:r>
+              <a:rPr lang="en-US" altLang="ko-KR" dirty="0"/>
+              <a:t>(e.g. </a:t>
+            </a:r>
+            <a:r>
+              <a:rPr lang="ko-KR" altLang="en-US" dirty="0"/>
+              <a:t>식사</a:t>
             </a:r>
             <a:r>
               <a:rPr lang="en-US" altLang="ko-KR" dirty="0"/>
@@ -6120,7 +7025,15 @@
             </a:r>
             <a:r>
               <a:rPr lang="ko-KR" altLang="en-US" dirty="0"/>
-              <a:t>호감도</a:t>
+              <a:t>휴식</a:t>
+            </a:r>
+            <a:r>
+              <a:rPr lang="en-US" altLang="ko-KR" dirty="0"/>
+              <a:t>)</a:t>
+            </a:r>
+            <a:r>
+              <a:rPr lang="ko-KR" altLang="en-US" dirty="0"/>
+              <a:t>을 찾아서 일정 상태를 안정적으로 유지하는</a:t>
             </a:r>
             <a:r>
               <a:rPr lang="en-US" altLang="ko-KR" dirty="0"/>
@@ -6128,38 +7041,44 @@
             </a:r>
             <a:r>
               <a:rPr lang="ko-KR" altLang="en-US" dirty="0"/>
-              <a:t>혹은 배고픔과 같은 상태 변화</a:t>
+              <a:t>시스템</a:t>
             </a:r>
             <a:endParaRPr lang="en-US" altLang="ko-KR" dirty="0"/>
           </a:p>
           <a:p>
             <a:r>
               <a:rPr lang="ko-KR" altLang="en-US" dirty="0"/>
-              <a:t>모든 능력치를 하나의 함수로 평가하는 것은 어렵다</a:t>
+              <a:t>현실의 인간관계처럼 복잡한 관계를 가진</a:t>
+            </a:r>
+            <a:r>
+              <a:rPr lang="en-US" altLang="ko-KR" dirty="0"/>
+              <a:t> </a:t>
+            </a:r>
+            <a:r>
+              <a:rPr lang="ko-KR" altLang="en-US" dirty="0"/>
+              <a:t>시스템</a:t>
             </a:r>
             <a:endParaRPr lang="en-US" altLang="ko-KR" dirty="0"/>
           </a:p>
           <a:p>
             <a:r>
               <a:rPr lang="ko-KR" altLang="en-US" dirty="0"/>
-              <a:t>따라서 모든 능력치의 변화를 </a:t>
-            </a:r>
-            <a:r>
-              <a:rPr lang="en-US" altLang="ko-KR" dirty="0"/>
-              <a:t>AI</a:t>
-            </a:r>
-            <a:r>
-              <a:rPr lang="ko-KR" altLang="en-US" dirty="0"/>
-              <a:t>가 필요로 하는 욕구로 환산하여 계산</a:t>
+              <a:t>스킬 등을 배우며 스스로 성장하는 시스템</a:t>
             </a:r>
             <a:endParaRPr lang="en-US" altLang="ko-KR" dirty="0"/>
+          </a:p>
+          <a:p>
+            <a:r>
+              <a:rPr lang="ko-KR" altLang="en-US" dirty="0"/>
+              <a:t>인간의 다양한 욕구를 표현할 수 있는 시스템</a:t>
+            </a:r>
           </a:p>
         </p:txBody>
       </p:sp>
     </p:spTree>
     <p:extLst>
       <p:ext uri="{BB962C8B-B14F-4D97-AF65-F5344CB8AC3E}">
-        <p14:creationId xmlns:p14="http://schemas.microsoft.com/office/powerpoint/2010/main" val="2343917839"/>
+        <p14:creationId xmlns:p14="http://schemas.microsoft.com/office/powerpoint/2010/main" val="3386727865"/>
       </p:ext>
     </p:extLst>
   </p:cSld>
@@ -6208,16 +7127,12 @@
           <a:lstStyle/>
           <a:p>
             <a:r>
-              <a:rPr lang="ko-KR" altLang="en-US" dirty="0"/>
-              <a:t>시스템상 </a:t>
-            </a:r>
-            <a:r>
               <a:rPr lang="en-US" altLang="ko-KR" dirty="0"/>
               <a:t>AI</a:t>
             </a:r>
             <a:r>
               <a:rPr lang="ko-KR" altLang="en-US" dirty="0"/>
-              <a:t>의 욕구에 대해</a:t>
+              <a:t>의 욕구 설계의 기반 이론</a:t>
             </a:r>
           </a:p>
         </p:txBody>
@@ -6387,16 +7302,12 @@
           <a:lstStyle/>
           <a:p>
             <a:r>
-              <a:rPr lang="ko-KR" altLang="en-US" dirty="0"/>
-              <a:t>시스템상 </a:t>
-            </a:r>
-            <a:r>
               <a:rPr lang="en-US" altLang="ko-KR" dirty="0"/>
               <a:t>AI</a:t>
             </a:r>
             <a:r>
               <a:rPr lang="ko-KR" altLang="en-US" dirty="0"/>
-              <a:t>의 욕구에 대해</a:t>
+              <a:t>의 욕구 설계의 기반 이론</a:t>
             </a:r>
           </a:p>
         </p:txBody>
@@ -6636,12 +7547,12 @@
         <p:spPr>
           <a:xfrm>
             <a:off x="838200" y="1690688"/>
-            <a:ext cx="10515600" cy="880100"/>
+            <a:ext cx="10515600" cy="1325562"/>
           </a:xfrm>
         </p:spPr>
         <p:txBody>
           <a:bodyPr>
-            <a:normAutofit fontScale="55000" lnSpcReduction="20000"/>
+            <a:normAutofit fontScale="62500" lnSpcReduction="20000"/>
           </a:bodyPr>
           <a:lstStyle/>
           <a:p>
@@ -6664,6 +7575,29 @@
             <a:r>
               <a:rPr lang="ko-KR" altLang="en-US" dirty="0"/>
               <a:t>개의 욕구가 있음</a:t>
+            </a:r>
+            <a:endParaRPr lang="en-US" altLang="ko-KR" dirty="0"/>
+          </a:p>
+          <a:p>
+            <a:r>
+              <a:rPr lang="ko-KR" altLang="en-US" dirty="0"/>
+              <a:t>각 욕구는 </a:t>
+            </a:r>
+            <a:r>
+              <a:rPr lang="en-US" altLang="ko-KR" dirty="0"/>
+              <a:t>0</a:t>
+            </a:r>
+            <a:r>
+              <a:rPr lang="ko-KR" altLang="en-US" dirty="0"/>
+              <a:t>부터 </a:t>
+            </a:r>
+            <a:r>
+              <a:rPr lang="en-US" altLang="ko-KR" dirty="0"/>
+              <a:t>100</a:t>
+            </a:r>
+            <a:r>
+              <a:rPr lang="ko-KR" altLang="en-US" dirty="0"/>
+              <a:t>까지의 실수</a:t>
             </a:r>
             <a:endParaRPr lang="en-US" altLang="ko-KR" dirty="0"/>
           </a:p>
@@ -6725,14 +7659,14 @@
           <p:nvPr>
             <p:extLst>
               <p:ext uri="{D42A27DB-BD31-4B8C-83A1-F6EECF244321}">
-                <p14:modId xmlns:p14="http://schemas.microsoft.com/office/powerpoint/2010/main" val="2595167373"/>
+                <p14:modId xmlns:p14="http://schemas.microsoft.com/office/powerpoint/2010/main" val="288265036"/>
               </p:ext>
             </p:extLst>
           </p:nvPr>
         </p:nvGraphicFramePr>
         <p:xfrm>
-          <a:off x="2032000" y="2840664"/>
-          <a:ext cx="8128000" cy="3337560"/>
+          <a:off x="2492213" y="3201035"/>
+          <a:ext cx="7207573" cy="3291840"/>
         </p:xfrm>
         <a:graphic>
           <a:graphicData uri="http://schemas.openxmlformats.org/drawingml/2006/table">
@@ -6741,21 +7675,21 @@
                 <a:tableStyleId>{5C22544A-7EE6-4342-B048-85BDC9FD1C3A}</a:tableStyleId>
               </a:tblPr>
               <a:tblGrid>
-                <a:gridCol w="2637436">
+                <a:gridCol w="2338769">
                   <a:extLst>
                     <a:ext uri="{9D8B030D-6E8A-4147-A177-3AD203B41FA5}">
                       <a16:colId xmlns:a16="http://schemas.microsoft.com/office/drawing/2014/main" val="2778200895"/>
                     </a:ext>
                   </a:extLst>
                 </a:gridCol>
-                <a:gridCol w="2728210">
+                <a:gridCol w="2419263">
                   <a:extLst>
                     <a:ext uri="{9D8B030D-6E8A-4147-A177-3AD203B41FA5}">
                       <a16:colId xmlns:a16="http://schemas.microsoft.com/office/drawing/2014/main" val="1431916538"/>
                     </a:ext>
                   </a:extLst>
                 </a:gridCol>
-                <a:gridCol w="2762354">
+                <a:gridCol w="2449541">
                   <a:extLst>
                     <a:ext uri="{9D8B030D-6E8A-4147-A177-3AD203B41FA5}">
                       <a16:colId xmlns:a16="http://schemas.microsoft.com/office/drawing/2014/main" val="1942007830"/>
@@ -6763,7 +7697,7 @@
                   </a:extLst>
                 </a:gridCol>
               </a:tblGrid>
-              <a:tr h="370840">
+              <a:tr h="276625">
                 <a:tc>
                   <a:txBody>
                     <a:bodyPr/>
@@ -6812,7 +7746,7 @@
                   </a:ext>
                 </a:extLst>
               </a:tr>
-              <a:tr h="370840">
+              <a:tr h="276625">
                 <a:tc>
                   <a:txBody>
                     <a:bodyPr/>
@@ -6863,7 +7797,7 @@
                   </a:ext>
                 </a:extLst>
               </a:tr>
-              <a:tr h="370840">
+              <a:tr h="276625">
                 <a:tc>
                   <a:txBody>
                     <a:bodyPr/>
@@ -6914,7 +7848,7 @@
                   </a:ext>
                 </a:extLst>
               </a:tr>
-              <a:tr h="370840">
+              <a:tr h="276625">
                 <a:tc>
                   <a:txBody>
                     <a:bodyPr/>
@@ -6965,7 +7899,7 @@
                   </a:ext>
                 </a:extLst>
               </a:tr>
-              <a:tr h="370840">
+              <a:tr h="276625">
                 <a:tc>
                   <a:txBody>
                     <a:bodyPr/>
@@ -6973,8 +7907,8 @@
                     <a:p>
                       <a:pPr latinLnBrk="1"/>
                       <a:r>
-                        <a:rPr lang="en-US" altLang="ko-KR" dirty="0" err="1"/>
-                        <a:t>Hygeine</a:t>
+                        <a:rPr lang="en-US" altLang="ko-KR" dirty="0"/>
+                        <a:t>Hygiene</a:t>
                       </a:r>
                       <a:endParaRPr lang="ko-KR" altLang="en-US" dirty="0"/>
                     </a:p>
@@ -7016,7 +7950,7 @@
                   </a:ext>
                 </a:extLst>
               </a:tr>
-              <a:tr h="370840">
+              <a:tr h="276625">
                 <a:tc>
                   <a:txBody>
                     <a:bodyPr/>
@@ -7037,10 +7971,9 @@
                     <a:lstStyle/>
                     <a:p>
                       <a:r>
-                        <a:rPr lang="ko-KR" altLang="en-US" dirty="0" err="1"/>
-                        <a:t>즐거음</a:t>
+                        <a:rPr lang="ko-KR" altLang="en-US" dirty="0"/>
+                        <a:t>즐거움</a:t>
                       </a:r>
-                      <a:endParaRPr lang="ko-KR" altLang="en-US" dirty="0"/>
                     </a:p>
                   </a:txBody>
                   <a:tcPr/>
@@ -7065,7 +7998,7 @@
                   </a:ext>
                 </a:extLst>
               </a:tr>
-              <a:tr h="370840">
+              <a:tr h="276625">
                 <a:tc>
                   <a:txBody>
                     <a:bodyPr/>
@@ -7116,7 +8049,7 @@
                   </a:ext>
                 </a:extLst>
               </a:tr>
-              <a:tr h="370840">
+              <a:tr h="276625">
                 <a:tc>
                   <a:txBody>
                     <a:bodyPr/>
@@ -7167,7 +8100,7 @@
                   </a:ext>
                 </a:extLst>
               </a:tr>
-              <a:tr h="370840">
+              <a:tr h="276625">
                 <a:tc>
                   <a:txBody>
                     <a:bodyPr/>
@@ -7280,60 +8213,241 @@
           </a:p>
         </p:txBody>
       </p:sp>
-      <p:sp>
-        <p:nvSpPr>
-          <p:cNvPr id="3" name="내용 개체 틀 2">
-            <a:extLst>
-              <a:ext uri="{FF2B5EF4-FFF2-40B4-BE49-F238E27FC236}">
-                <a16:creationId xmlns:a16="http://schemas.microsoft.com/office/drawing/2014/main" id="{28A54953-1321-EFFC-A66F-4E45D731241E}"/>
-              </a:ext>
-            </a:extLst>
-          </p:cNvPr>
-          <p:cNvSpPr>
-            <a:spLocks noGrp="1"/>
-          </p:cNvSpPr>
-          <p:nvPr>
-            <p:ph idx="1"/>
-          </p:nvPr>
-        </p:nvSpPr>
-        <p:spPr/>
-        <p:txBody>
-          <a:bodyPr/>
-          <a:lstStyle/>
-          <a:p>
-            <a:r>
-              <a:rPr lang="en-US" altLang="ko-KR" dirty="0"/>
-              <a:t>E </a:t>
-            </a:r>
-            <a:r>
-              <a:rPr lang="ko-KR" altLang="en-US" dirty="0"/>
-              <a:t>타입의 욕구는 생명유지와 건강에 직결되므로 만일 기준치 이하가 된다면 급격히 필요해짐</a:t>
-            </a:r>
-            <a:endParaRPr lang="en-US" altLang="ko-KR" dirty="0"/>
-          </a:p>
-          <a:p>
-            <a:r>
-              <a:rPr lang="ko-KR" altLang="en-US" dirty="0"/>
-              <a:t>하지만 욕구가 어느 정도 충족 된다면 더 이상은 생각이 안 남</a:t>
-            </a:r>
-            <a:br>
-              <a:rPr lang="en-US" altLang="ko-KR" dirty="0"/>
-            </a:br>
-            <a:r>
-              <a:rPr lang="en-US" altLang="ko-KR" dirty="0"/>
-              <a:t>(</a:t>
-            </a:r>
-            <a:r>
-              <a:rPr lang="ko-KR" altLang="en-US" dirty="0"/>
-              <a:t>배부른 상태에선 더 이상 먹고 싶지 않음</a:t>
-            </a:r>
-            <a:r>
-              <a:rPr lang="en-US" altLang="ko-KR" dirty="0"/>
-              <a:t>)</a:t>
-            </a:r>
-          </a:p>
-        </p:txBody>
-      </p:sp>
+      <mc:AlternateContent xmlns:mc="http://schemas.openxmlformats.org/markup-compatibility/2006" xmlns:a14="http://schemas.microsoft.com/office/drawing/2010/main">
+        <mc:Choice Requires="a14">
+          <p:sp>
+            <p:nvSpPr>
+              <p:cNvPr id="3" name="내용 개체 틀 2">
+                <a:extLst>
+                  <a:ext uri="{FF2B5EF4-FFF2-40B4-BE49-F238E27FC236}">
+                    <a16:creationId xmlns:a16="http://schemas.microsoft.com/office/drawing/2014/main" id="{28A54953-1321-EFFC-A66F-4E45D731241E}"/>
+                  </a:ext>
+                </a:extLst>
+              </p:cNvPr>
+              <p:cNvSpPr>
+                <a:spLocks noGrp="1"/>
+              </p:cNvSpPr>
+              <p:nvPr>
+                <p:ph idx="1"/>
+              </p:nvPr>
+            </p:nvSpPr>
+            <p:spPr/>
+            <p:txBody>
+              <a:bodyPr/>
+              <a:lstStyle/>
+              <a:p>
+                <a:r>
+                  <a:rPr lang="en-US" altLang="ko-KR" dirty="0"/>
+                  <a:t>E </a:t>
+                </a:r>
+                <a:r>
+                  <a:rPr lang="ko-KR" altLang="en-US" dirty="0"/>
+                  <a:t>타입의 욕구는 생명유지와 건강에 직결되므로 만일 기준치 이하가 된다면 급격히 필요해짐</a:t>
+                </a:r>
+                <a:endParaRPr lang="en-US" altLang="ko-KR" dirty="0"/>
+              </a:p>
+              <a:p>
+                <a:r>
+                  <a:rPr lang="ko-KR" altLang="en-US" dirty="0"/>
+                  <a:t>하지만 욕구가 어느 정도 충족 된다면 더 이상은 생각이 안 남</a:t>
+                </a:r>
+                <a:br>
+                  <a:rPr lang="en-US" altLang="ko-KR" dirty="0"/>
+                </a:br>
+                <a:r>
+                  <a:rPr lang="en-US" altLang="ko-KR" dirty="0"/>
+                  <a:t>(</a:t>
+                </a:r>
+                <a:r>
+                  <a:rPr lang="ko-KR" altLang="en-US" dirty="0"/>
+                  <a:t>배부른 상태에서는 더 이상 먹고 싶지 않음</a:t>
+                </a:r>
+                <a:r>
+                  <a:rPr lang="en-US" altLang="ko-KR" dirty="0"/>
+                  <a:t>)</a:t>
+                </a:r>
+              </a:p>
+              <a:p>
+                <a:r>
+                  <a:rPr lang="ko-KR" altLang="en-US" dirty="0"/>
+                  <a:t>이 시스템에서는 다음과 같은 수식으로 욕구 가중치를 표현</a:t>
+                </a:r>
+                <a:br>
+                  <a:rPr lang="en-US" altLang="ko-KR" dirty="0"/>
+                </a:br>
+                <a14:m>
+                  <m:oMath xmlns:m="http://schemas.openxmlformats.org/officeDocument/2006/math">
+                    <m:r>
+                      <m:rPr>
+                        <m:sty m:val="p"/>
+                      </m:rPr>
+                      <a:rPr lang="en-US" altLang="ko-KR" b="0" i="1" smtClean="0">
+                        <a:latin typeface="Cambria Math" panose="02040503050406030204" pitchFamily="18" charset="0"/>
+                      </a:rPr>
+                      <m:t>diff</m:t>
+                    </m:r>
+                    <m:r>
+                      <a:rPr lang="en-US" altLang="ko-KR" b="0" i="1" smtClean="0">
+                        <a:latin typeface="Cambria Math" panose="02040503050406030204" pitchFamily="18" charset="0"/>
+                      </a:rPr>
+                      <m:t>=(100−</m:t>
+                    </m:r>
+                    <m:sSub>
+                      <m:sSubPr>
+                        <m:ctrlPr>
+                          <a:rPr lang="en-US" altLang="ko-KR" b="0" i="1" smtClean="0">
+                            <a:latin typeface="Cambria Math" panose="02040503050406030204" pitchFamily="18" charset="0"/>
+                          </a:rPr>
+                        </m:ctrlPr>
+                      </m:sSubPr>
+                      <m:e>
+                        <m:r>
+                          <m:rPr>
+                            <m:sty m:val="p"/>
+                          </m:rPr>
+                          <a:rPr lang="en-US" altLang="ko-KR" b="0" i="1" smtClean="0">
+                            <a:latin typeface="Cambria Math" panose="02040503050406030204" pitchFamily="18" charset="0"/>
+                          </a:rPr>
+                          <m:t>need</m:t>
+                        </m:r>
+                      </m:e>
+                      <m:sub>
+                        <m:r>
+                          <m:rPr>
+                            <m:sty m:val="p"/>
+                          </m:rPr>
+                          <a:rPr lang="en-US" altLang="ko-KR" b="0" i="1" smtClean="0">
+                            <a:latin typeface="Cambria Math" panose="02040503050406030204" pitchFamily="18" charset="0"/>
+                          </a:rPr>
+                          <m:t>cur</m:t>
+                        </m:r>
+                      </m:sub>
+                    </m:sSub>
+                    <m:r>
+                      <a:rPr lang="en-US" altLang="ko-KR" b="0" i="1" smtClean="0">
+                        <a:latin typeface="Cambria Math" panose="02040503050406030204" pitchFamily="18" charset="0"/>
+                      </a:rPr>
+                      <m:t>), </m:t>
+                    </m:r>
+                    <m:r>
+                      <m:rPr>
+                        <m:sty m:val="p"/>
+                      </m:rPr>
+                      <a:rPr lang="en-US" altLang="ko-KR" b="0" i="1" smtClean="0">
+                        <a:latin typeface="Cambria Math" panose="02040503050406030204" pitchFamily="18" charset="0"/>
+                      </a:rPr>
+                      <m:t>score</m:t>
+                    </m:r>
+                    <m:r>
+                      <a:rPr lang="en-US" altLang="ko-KR" b="0" i="1" smtClean="0">
+                        <a:latin typeface="Cambria Math" panose="02040503050406030204" pitchFamily="18" charset="0"/>
+                      </a:rPr>
+                      <m:t>=</m:t>
+                    </m:r>
+                    <m:sSup>
+                      <m:sSupPr>
+                        <m:ctrlPr>
+                          <a:rPr lang="en-US" altLang="ko-KR" b="0" i="1" smtClean="0">
+                            <a:latin typeface="Cambria Math" panose="02040503050406030204" pitchFamily="18" charset="0"/>
+                          </a:rPr>
+                        </m:ctrlPr>
+                      </m:sSupPr>
+                      <m:e>
+                        <m:r>
+                          <a:rPr lang="en-US" altLang="ko-KR" b="0" i="1" smtClean="0">
+                            <a:latin typeface="Cambria Math" panose="02040503050406030204" pitchFamily="18" charset="0"/>
+                          </a:rPr>
+                          <m:t>0.3</m:t>
+                        </m:r>
+                      </m:e>
+                      <m:sup>
+                        <m:r>
+                          <a:rPr lang="en-US" altLang="ko-KR" b="0" i="1" smtClean="0">
+                            <a:latin typeface="Cambria Math" panose="02040503050406030204" pitchFamily="18" charset="0"/>
+                          </a:rPr>
+                          <m:t>−</m:t>
+                        </m:r>
+                        <m:d>
+                          <m:dPr>
+                            <m:ctrlPr>
+                              <a:rPr lang="en-US" altLang="ko-KR" b="0" i="1" smtClean="0">
+                                <a:latin typeface="Cambria Math" panose="02040503050406030204" pitchFamily="18" charset="0"/>
+                              </a:rPr>
+                            </m:ctrlPr>
+                          </m:dPr>
+                          <m:e>
+                            <m:r>
+                              <m:rPr>
+                                <m:sty m:val="p"/>
+                              </m:rPr>
+                              <a:rPr lang="en-US" altLang="ko-KR" b="0" i="1" smtClean="0">
+                                <a:latin typeface="Cambria Math" panose="02040503050406030204" pitchFamily="18" charset="0"/>
+                              </a:rPr>
+                              <m:t>diff</m:t>
+                            </m:r>
+                            <m:r>
+                              <a:rPr lang="en-US" altLang="ko-KR" b="0" i="1" smtClean="0">
+                                <a:latin typeface="Cambria Math" panose="02040503050406030204" pitchFamily="18" charset="0"/>
+                              </a:rPr>
+                              <m:t>−50</m:t>
+                            </m:r>
+                          </m:e>
+                        </m:d>
+                        <m:r>
+                          <a:rPr lang="en-US" altLang="ko-KR" b="0" i="1" smtClean="0">
+                            <a:latin typeface="Cambria Math" panose="02040503050406030204" pitchFamily="18" charset="0"/>
+                          </a:rPr>
+                          <m:t>/3</m:t>
+                        </m:r>
+                      </m:sup>
+                    </m:sSup>
+                  </m:oMath>
+                </a14:m>
+                <a:endParaRPr lang="en-US" altLang="ko-KR" dirty="0"/>
+              </a:p>
+            </p:txBody>
+          </p:sp>
+        </mc:Choice>
+        <mc:Fallback xmlns="">
+          <p:sp>
+            <p:nvSpPr>
+              <p:cNvPr id="3" name="내용 개체 틀 2">
+                <a:extLst>
+                  <a:ext uri="{FF2B5EF4-FFF2-40B4-BE49-F238E27FC236}">
+                    <a16:creationId xmlns:a16="http://schemas.microsoft.com/office/drawing/2014/main" id="{28A54953-1321-EFFC-A66F-4E45D731241E}"/>
+                  </a:ext>
+                </a:extLst>
+              </p:cNvPr>
+              <p:cNvSpPr>
+                <a:spLocks noGrp="1" noRot="1" noChangeAspect="1" noMove="1" noResize="1" noEditPoints="1" noAdjustHandles="1" noChangeArrowheads="1" noChangeShapeType="1" noTextEdit="1"/>
+              </p:cNvSpPr>
+              <p:nvPr>
+                <p:ph idx="1"/>
+              </p:nvPr>
+            </p:nvSpPr>
+            <p:spPr>
+              <a:blipFill>
+                <a:blip r:embed="rId2"/>
+                <a:stretch>
+                  <a:fillRect l="-1043" t="-2381" r="-928"/>
+                </a:stretch>
+              </a:blipFill>
+            </p:spPr>
+            <p:txBody>
+              <a:bodyPr/>
+              <a:lstStyle/>
+              <a:p>
+                <a:r>
+                  <a:rPr lang="ko-KR" altLang="en-US">
+                    <a:noFill/>
+                  </a:rPr>
+                  <a:t> </a:t>
+                </a:r>
+              </a:p>
+            </p:txBody>
+          </p:sp>
+        </mc:Fallback>
+      </mc:AlternateContent>
     </p:spTree>
     <p:extLst>
       <p:ext uri="{BB962C8B-B14F-4D97-AF65-F5344CB8AC3E}">
@@ -7398,61 +8512,213 @@
           </a:p>
         </p:txBody>
       </p:sp>
-      <p:sp>
-        <p:nvSpPr>
-          <p:cNvPr id="3" name="내용 개체 틀 2">
-            <a:extLst>
-              <a:ext uri="{FF2B5EF4-FFF2-40B4-BE49-F238E27FC236}">
-                <a16:creationId xmlns:a16="http://schemas.microsoft.com/office/drawing/2014/main" id="{2B52CE52-63FF-5E32-791D-71488727F905}"/>
-              </a:ext>
-            </a:extLst>
-          </p:cNvPr>
-          <p:cNvSpPr>
-            <a:spLocks noGrp="1"/>
-          </p:cNvSpPr>
-          <p:nvPr>
-            <p:ph idx="1"/>
-          </p:nvPr>
-        </p:nvSpPr>
-        <p:spPr/>
-        <p:txBody>
-          <a:bodyPr/>
-          <a:lstStyle/>
-          <a:p>
-            <a:r>
-              <a:rPr lang="en-US" altLang="ko-KR" dirty="0"/>
-              <a:t>R </a:t>
-            </a:r>
-            <a:r>
-              <a:rPr lang="ko-KR" altLang="en-US" dirty="0"/>
-              <a:t>타입의 욕구는 인간관계 혹은 즐거움을 의미함</a:t>
-            </a:r>
-            <a:endParaRPr lang="en-US" altLang="ko-KR" dirty="0"/>
-          </a:p>
-          <a:p>
-            <a:r>
-              <a:rPr lang="ko-KR" altLang="en-US" dirty="0"/>
-              <a:t>부족하다고 생명의 위협을 느끼지는 않지만</a:t>
-            </a:r>
-            <a:r>
-              <a:rPr lang="en-US" altLang="ko-KR" dirty="0"/>
-              <a:t>, </a:t>
-            </a:r>
-            <a:r>
-              <a:rPr lang="ko-KR" altLang="en-US" dirty="0"/>
-              <a:t>개인의 행복에 관여하므로 필요함</a:t>
-            </a:r>
-            <a:endParaRPr lang="en-US" altLang="ko-KR" dirty="0"/>
-          </a:p>
-          <a:p>
-            <a:r>
-              <a:rPr lang="ko-KR" altLang="en-US" dirty="0"/>
-              <a:t>따라서 꾸준한 필요가 있음</a:t>
-            </a:r>
-            <a:endParaRPr lang="en-US" altLang="ko-KR" dirty="0"/>
-          </a:p>
-        </p:txBody>
-      </p:sp>
+      <mc:AlternateContent xmlns:mc="http://schemas.openxmlformats.org/markup-compatibility/2006" xmlns:a14="http://schemas.microsoft.com/office/drawing/2010/main">
+        <mc:Choice Requires="a14">
+          <p:sp>
+            <p:nvSpPr>
+              <p:cNvPr id="3" name="내용 개체 틀 2">
+                <a:extLst>
+                  <a:ext uri="{FF2B5EF4-FFF2-40B4-BE49-F238E27FC236}">
+                    <a16:creationId xmlns:a16="http://schemas.microsoft.com/office/drawing/2014/main" id="{2B52CE52-63FF-5E32-791D-71488727F905}"/>
+                  </a:ext>
+                </a:extLst>
+              </p:cNvPr>
+              <p:cNvSpPr>
+                <a:spLocks noGrp="1"/>
+              </p:cNvSpPr>
+              <p:nvPr>
+                <p:ph idx="1"/>
+              </p:nvPr>
+            </p:nvSpPr>
+            <p:spPr/>
+            <p:txBody>
+              <a:bodyPr/>
+              <a:lstStyle/>
+              <a:p>
+                <a:r>
+                  <a:rPr lang="en-US" altLang="ko-KR" dirty="0"/>
+                  <a:t>R </a:t>
+                </a:r>
+                <a:r>
+                  <a:rPr lang="ko-KR" altLang="en-US" dirty="0"/>
+                  <a:t>타입의 욕구는 인간관계 혹은 즐거움을 의미함</a:t>
+                </a:r>
+                <a:endParaRPr lang="en-US" altLang="ko-KR" dirty="0"/>
+              </a:p>
+              <a:p>
+                <a:r>
+                  <a:rPr lang="ko-KR" altLang="en-US" dirty="0"/>
+                  <a:t>부족하다고 생명의 위협을 느끼지는 않지만</a:t>
+                </a:r>
+                <a:r>
+                  <a:rPr lang="en-US" altLang="ko-KR" dirty="0"/>
+                  <a:t>, </a:t>
+                </a:r>
+                <a:r>
+                  <a:rPr lang="ko-KR" altLang="en-US" dirty="0"/>
+                  <a:t>개인의 행복에 관여하므로 필요함</a:t>
+                </a:r>
+                <a:endParaRPr lang="en-US" altLang="ko-KR" dirty="0"/>
+              </a:p>
+              <a:p>
+                <a:r>
+                  <a:rPr lang="ko-KR" altLang="en-US" dirty="0"/>
+                  <a:t>인간은 놀고 싶은 욕망과 인간관계에 대한 욕망이 있으므로 일반적 상황에서는 가장 우세함</a:t>
+                </a:r>
+                <a:endParaRPr lang="en-US" altLang="ko-KR" dirty="0"/>
+              </a:p>
+              <a:p>
+                <a:r>
+                  <a:rPr lang="ko-KR" altLang="en-US" dirty="0"/>
+                  <a:t>이 시스템에서는 다음의 식으로 표현</a:t>
+                </a:r>
+                <a:br>
+                  <a:rPr lang="en-US" altLang="ko-KR" dirty="0"/>
+                </a:br>
+                <a14:m>
+                  <m:oMath xmlns:m="http://schemas.openxmlformats.org/officeDocument/2006/math">
+                    <m:r>
+                      <m:rPr>
+                        <m:sty m:val="p"/>
+                      </m:rPr>
+                      <a:rPr lang="en-US" altLang="ko-KR" b="0" i="1" smtClean="0">
+                        <a:latin typeface="Cambria Math" panose="02040503050406030204" pitchFamily="18" charset="0"/>
+                      </a:rPr>
+                      <m:t>diff</m:t>
+                    </m:r>
+                    <m:r>
+                      <a:rPr lang="en-US" altLang="ko-KR" b="0" i="1" smtClean="0">
+                        <a:latin typeface="Cambria Math" panose="02040503050406030204" pitchFamily="18" charset="0"/>
+                      </a:rPr>
+                      <m:t> =(100−</m:t>
+                    </m:r>
+                    <m:sSub>
+                      <m:sSubPr>
+                        <m:ctrlPr>
+                          <a:rPr lang="en-US" altLang="ko-KR" b="0" i="1" smtClean="0">
+                            <a:latin typeface="Cambria Math" panose="02040503050406030204" pitchFamily="18" charset="0"/>
+                          </a:rPr>
+                        </m:ctrlPr>
+                      </m:sSubPr>
+                      <m:e>
+                        <m:r>
+                          <m:rPr>
+                            <m:sty m:val="p"/>
+                          </m:rPr>
+                          <a:rPr lang="en-US" altLang="ko-KR" b="0" i="1" smtClean="0">
+                            <a:latin typeface="Cambria Math" panose="02040503050406030204" pitchFamily="18" charset="0"/>
+                          </a:rPr>
+                          <m:t>need</m:t>
+                        </m:r>
+                      </m:e>
+                      <m:sub>
+                        <m:r>
+                          <m:rPr>
+                            <m:sty m:val="p"/>
+                          </m:rPr>
+                          <a:rPr lang="en-US" altLang="ko-KR" b="0" i="1" smtClean="0">
+                            <a:latin typeface="Cambria Math" panose="02040503050406030204" pitchFamily="18" charset="0"/>
+                          </a:rPr>
+                          <m:t>cur</m:t>
+                        </m:r>
+                      </m:sub>
+                    </m:sSub>
+                    <m:r>
+                      <a:rPr lang="en-US" altLang="ko-KR" b="0" i="1" smtClean="0">
+                        <a:latin typeface="Cambria Math" panose="02040503050406030204" pitchFamily="18" charset="0"/>
+                      </a:rPr>
+                      <m:t>), </m:t>
+                    </m:r>
+                    <m:r>
+                      <m:rPr>
+                        <m:sty m:val="p"/>
+                      </m:rPr>
+                      <a:rPr lang="en-US" altLang="ko-KR" b="0" i="1" smtClean="0">
+                        <a:latin typeface="Cambria Math" panose="02040503050406030204" pitchFamily="18" charset="0"/>
+                      </a:rPr>
+                      <m:t>score</m:t>
+                    </m:r>
+                    <m:r>
+                      <a:rPr lang="en-US" altLang="ko-KR" b="0" i="1" smtClean="0">
+                        <a:latin typeface="Cambria Math" panose="02040503050406030204" pitchFamily="18" charset="0"/>
+                      </a:rPr>
+                      <m:t>=1000+</m:t>
+                    </m:r>
+                    <m:sSup>
+                      <m:sSupPr>
+                        <m:ctrlPr>
+                          <a:rPr lang="en-US" altLang="ko-KR" b="0" i="1" smtClean="0">
+                            <a:latin typeface="Cambria Math" panose="02040503050406030204" pitchFamily="18" charset="0"/>
+                          </a:rPr>
+                        </m:ctrlPr>
+                      </m:sSupPr>
+                      <m:e>
+                        <m:r>
+                          <m:rPr>
+                            <m:sty m:val="p"/>
+                          </m:rPr>
+                          <a:rPr lang="en-US" altLang="ko-KR" b="0" i="1" smtClean="0">
+                            <a:latin typeface="Cambria Math" panose="02040503050406030204" pitchFamily="18" charset="0"/>
+                          </a:rPr>
+                          <m:t>diff</m:t>
+                        </m:r>
+                      </m:e>
+                      <m:sup>
+                        <m:r>
+                          <a:rPr lang="en-US" altLang="ko-KR" b="0" i="1" smtClean="0">
+                            <a:latin typeface="Cambria Math" panose="02040503050406030204" pitchFamily="18" charset="0"/>
+                          </a:rPr>
+                          <m:t>3</m:t>
+                        </m:r>
+                      </m:sup>
+                    </m:sSup>
+                  </m:oMath>
+                </a14:m>
+                <a:endParaRPr lang="en-US" altLang="ko-KR" dirty="0"/>
+              </a:p>
+            </p:txBody>
+          </p:sp>
+        </mc:Choice>
+        <mc:Fallback xmlns="">
+          <p:sp>
+            <p:nvSpPr>
+              <p:cNvPr id="3" name="내용 개체 틀 2">
+                <a:extLst>
+                  <a:ext uri="{FF2B5EF4-FFF2-40B4-BE49-F238E27FC236}">
+                    <a16:creationId xmlns:a16="http://schemas.microsoft.com/office/drawing/2014/main" id="{2B52CE52-63FF-5E32-791D-71488727F905}"/>
+                  </a:ext>
+                </a:extLst>
+              </p:cNvPr>
+              <p:cNvSpPr>
+                <a:spLocks noGrp="1" noRot="1" noChangeAspect="1" noMove="1" noResize="1" noEditPoints="1" noAdjustHandles="1" noChangeArrowheads="1" noChangeShapeType="1" noTextEdit="1"/>
+              </p:cNvSpPr>
+              <p:nvPr>
+                <p:ph idx="1"/>
+              </p:nvPr>
+            </p:nvSpPr>
+            <p:spPr>
+              <a:blipFill>
+                <a:blip r:embed="rId2"/>
+                <a:stretch>
+                  <a:fillRect l="-1043" t="-2381"/>
+                </a:stretch>
+              </a:blipFill>
+            </p:spPr>
+            <p:txBody>
+              <a:bodyPr/>
+              <a:lstStyle/>
+              <a:p>
+                <a:r>
+                  <a:rPr lang="ko-KR" altLang="en-US">
+                    <a:noFill/>
+                  </a:rPr>
+                  <a:t> </a:t>
+                </a:r>
+              </a:p>
+            </p:txBody>
+          </p:sp>
+        </mc:Fallback>
+      </mc:AlternateContent>
     </p:spTree>
     <p:extLst>
       <p:ext uri="{BB962C8B-B14F-4D97-AF65-F5344CB8AC3E}">
